--- a/data-frameworks/09-global-landscape-human-resources.pptx
+++ b/data-frameworks/09-global-landscape-human-resources.pptx
@@ -4,8 +4,23 @@
   <p:sldMasterIdLst>
     <p:sldMasterId id="2147483648" r:id="rId1"/>
   </p:sldMasterIdLst>
+  <p:notesMasterIdLst>
+    <p:notesMasterId r:id="rId15"/>
+  </p:notesMasterIdLst>
   <p:sldIdLst>
     <p:sldId id="256" r:id="rId2"/>
+    <p:sldId id="257" r:id="rId3"/>
+    <p:sldId id="258" r:id="rId4"/>
+    <p:sldId id="259" r:id="rId5"/>
+    <p:sldId id="260" r:id="rId6"/>
+    <p:sldId id="261" r:id="rId7"/>
+    <p:sldId id="262" r:id="rId8"/>
+    <p:sldId id="263" r:id="rId9"/>
+    <p:sldId id="264" r:id="rId10"/>
+    <p:sldId id="265" r:id="rId11"/>
+    <p:sldId id="266" r:id="rId12"/>
+    <p:sldId id="267" r:id="rId13"/>
+    <p:sldId id="268" r:id="rId14"/>
   </p:sldIdLst>
   <p:sldSz cx="9144000" cy="5143500" type="screen16x9"/>
   <p:notesSz cx="6858000" cy="9144000"/>
@@ -121,6 +136,667 @@
     </p:ext>
   </p:extLst>
 </p:presentation>
+</file>
+
+<file path=ppt/notesMasters/notesMaster1.xml><?xml version="1.0" encoding="utf-8"?>
+<p:notesMaster xmlns:a="http://schemas.openxmlformats.org/drawingml/2006/main" xmlns:r="http://schemas.openxmlformats.org/officeDocument/2006/relationships" xmlns:p="http://schemas.openxmlformats.org/presentationml/2006/main">
+  <p:cSld>
+    <p:bg>
+      <p:bgRef idx="1001">
+        <a:schemeClr val="bg1"/>
+      </p:bgRef>
+    </p:bg>
+    <p:spTree>
+      <p:nvGrpSpPr>
+        <p:cNvPr id="1" name=""/>
+        <p:cNvGrpSpPr/>
+        <p:nvPr/>
+      </p:nvGrpSpPr>
+      <p:grpSpPr>
+        <a:xfrm>
+          <a:off x="0" y="0"/>
+          <a:ext cx="0" cy="0"/>
+          <a:chOff x="0" y="0"/>
+          <a:chExt cx="0" cy="0"/>
+        </a:xfrm>
+      </p:grpSpPr>
+      <p:sp>
+        <p:nvSpPr>
+          <p:cNvPr id="2" name="Header Placeholder 1"/>
+          <p:cNvSpPr>
+            <a:spLocks noGrp="1"/>
+          </p:cNvSpPr>
+          <p:nvPr>
+            <p:ph type="hdr" sz="quarter"/>
+          </p:nvPr>
+        </p:nvSpPr>
+        <p:spPr>
+          <a:xfrm>
+            <a:off x="0" y="0"/>
+            <a:ext cx="2971800" cy="458788"/>
+          </a:xfrm>
+          <a:prstGeom prst="rect">
+            <a:avLst/>
+          </a:prstGeom>
+        </p:spPr>
+        <p:txBody>
+          <a:bodyPr vert="horz" lIns="91440" tIns="45720" rIns="91440" bIns="45720" rtlCol="0"/>
+          <a:lstStyle>
+            <a:lvl1pPr algn="l">
+              <a:defRPr sz="1200"/>
+            </a:lvl1pPr>
+          </a:lstStyle>
+          <a:p>
+            <a:endParaRPr lang="en-US"/>
+          </a:p>
+        </p:txBody>
+      </p:sp>
+      <p:sp>
+        <p:nvSpPr>
+          <p:cNvPr id="3" name="Date Placeholder 2"/>
+          <p:cNvSpPr>
+            <a:spLocks noGrp="1"/>
+          </p:cNvSpPr>
+          <p:nvPr>
+            <p:ph type="dt" idx="1"/>
+          </p:nvPr>
+        </p:nvSpPr>
+        <p:spPr>
+          <a:xfrm>
+            <a:off x="3884613" y="0"/>
+            <a:ext cx="2971800" cy="458788"/>
+          </a:xfrm>
+          <a:prstGeom prst="rect">
+            <a:avLst/>
+          </a:prstGeom>
+        </p:spPr>
+        <p:txBody>
+          <a:bodyPr vert="horz" lIns="91440" tIns="45720" rIns="91440" bIns="45720" rtlCol="0"/>
+          <a:lstStyle>
+            <a:lvl1pPr algn="r">
+              <a:defRPr sz="1200"/>
+            </a:lvl1pPr>
+          </a:lstStyle>
+          <a:p>
+            <a:fld id="{0F9C1CCF-B725-44A7-AA57-5E433BD85C9F}" type="datetimeFigureOut">
+              <a:rPr lang="en-US" smtClean="0"/>
+              <a:t>1/2/22</a:t>
+            </a:fld>
+            <a:endParaRPr lang="en-US"/>
+          </a:p>
+        </p:txBody>
+      </p:sp>
+      <p:sp>
+        <p:nvSpPr>
+          <p:cNvPr id="4" name="Slide Image Placeholder 3"/>
+          <p:cNvSpPr>
+            <a:spLocks noGrp="1" noRot="1" noChangeAspect="1"/>
+          </p:cNvSpPr>
+          <p:nvPr>
+            <p:ph type="sldImg" idx="2"/>
+          </p:nvPr>
+        </p:nvSpPr>
+        <p:spPr>
+          <a:xfrm>
+            <a:off x="685800" y="1143000"/>
+            <a:ext cx="5486400" cy="3086100"/>
+          </a:xfrm>
+          <a:prstGeom prst="rect">
+            <a:avLst/>
+          </a:prstGeom>
+          <a:noFill/>
+          <a:ln w="12700">
+            <a:solidFill>
+              <a:prstClr val="black"/>
+            </a:solidFill>
+          </a:ln>
+        </p:spPr>
+        <p:txBody>
+          <a:bodyPr vert="horz" lIns="91440" tIns="45720" rIns="91440" bIns="45720" rtlCol="0" anchor="ctr"/>
+          <a:lstStyle/>
+          <a:p>
+            <a:endParaRPr lang="en-US"/>
+          </a:p>
+        </p:txBody>
+      </p:sp>
+      <p:sp>
+        <p:nvSpPr>
+          <p:cNvPr id="5" name="Notes Placeholder 4"/>
+          <p:cNvSpPr>
+            <a:spLocks noGrp="1"/>
+          </p:cNvSpPr>
+          <p:nvPr>
+            <p:ph type="body" sz="quarter" idx="3"/>
+          </p:nvPr>
+        </p:nvSpPr>
+        <p:spPr>
+          <a:xfrm>
+            <a:off x="685800" y="4400550"/>
+            <a:ext cx="5486400" cy="3600450"/>
+          </a:xfrm>
+          <a:prstGeom prst="rect">
+            <a:avLst/>
+          </a:prstGeom>
+        </p:spPr>
+        <p:txBody>
+          <a:bodyPr vert="horz" lIns="91440" tIns="45720" rIns="91440" bIns="45720" rtlCol="0"/>
+          <a:lstStyle/>
+          <a:p>
+            <a:pPr lvl="0"/>
+            <a:r>
+              <a:rPr lang="en-US"/>
+              <a:t>Click to edit Master text styles</a:t>
+            </a:r>
+          </a:p>
+          <a:p>
+            <a:pPr lvl="1"/>
+            <a:r>
+              <a:rPr lang="en-US"/>
+              <a:t>Second level</a:t>
+            </a:r>
+          </a:p>
+          <a:p>
+            <a:pPr lvl="2"/>
+            <a:r>
+              <a:rPr lang="en-US"/>
+              <a:t>Third level</a:t>
+            </a:r>
+          </a:p>
+          <a:p>
+            <a:pPr lvl="3"/>
+            <a:r>
+              <a:rPr lang="en-US"/>
+              <a:t>Fourth level</a:t>
+            </a:r>
+          </a:p>
+          <a:p>
+            <a:pPr lvl="4"/>
+            <a:r>
+              <a:rPr lang="en-US"/>
+              <a:t>Fifth level</a:t>
+            </a:r>
+          </a:p>
+        </p:txBody>
+      </p:sp>
+      <p:sp>
+        <p:nvSpPr>
+          <p:cNvPr id="6" name="Footer Placeholder 5"/>
+          <p:cNvSpPr>
+            <a:spLocks noGrp="1"/>
+          </p:cNvSpPr>
+          <p:nvPr>
+            <p:ph type="ftr" sz="quarter" idx="4"/>
+          </p:nvPr>
+        </p:nvSpPr>
+        <p:spPr>
+          <a:xfrm>
+            <a:off x="0" y="8685213"/>
+            <a:ext cx="2971800" cy="458787"/>
+          </a:xfrm>
+          <a:prstGeom prst="rect">
+            <a:avLst/>
+          </a:prstGeom>
+        </p:spPr>
+        <p:txBody>
+          <a:bodyPr vert="horz" lIns="91440" tIns="45720" rIns="91440" bIns="45720" rtlCol="0" anchor="b"/>
+          <a:lstStyle>
+            <a:lvl1pPr algn="l">
+              <a:defRPr sz="1200"/>
+            </a:lvl1pPr>
+          </a:lstStyle>
+          <a:p>
+            <a:endParaRPr lang="en-US"/>
+          </a:p>
+        </p:txBody>
+      </p:sp>
+      <p:sp>
+        <p:nvSpPr>
+          <p:cNvPr id="7" name="Slide Number Placeholder 6"/>
+          <p:cNvSpPr>
+            <a:spLocks noGrp="1"/>
+          </p:cNvSpPr>
+          <p:nvPr>
+            <p:ph type="sldNum" sz="quarter" idx="5"/>
+          </p:nvPr>
+        </p:nvSpPr>
+        <p:spPr>
+          <a:xfrm>
+            <a:off x="3884613" y="8685213"/>
+            <a:ext cx="2971800" cy="458787"/>
+          </a:xfrm>
+          <a:prstGeom prst="rect">
+            <a:avLst/>
+          </a:prstGeom>
+        </p:spPr>
+        <p:txBody>
+          <a:bodyPr vert="horz" lIns="91440" tIns="45720" rIns="91440" bIns="45720" rtlCol="0" anchor="b"/>
+          <a:lstStyle>
+            <a:lvl1pPr algn="r">
+              <a:defRPr sz="1200"/>
+            </a:lvl1pPr>
+          </a:lstStyle>
+          <a:p>
+            <a:fld id="{18BDFEC3-8487-43E8-A154-7C12CBC1FFF2}" type="slidenum">
+              <a:rPr lang="en-US" smtClean="0"/>
+              <a:t>‹#›</a:t>
+            </a:fld>
+            <a:endParaRPr lang="en-US"/>
+          </a:p>
+        </p:txBody>
+      </p:sp>
+    </p:spTree>
+    <p:extLst>
+      <p:ext uri="{BB962C8B-B14F-4D97-AF65-F5344CB8AC3E}">
+        <p14:creationId xmlns:p14="http://schemas.microsoft.com/office/powerpoint/2010/main" val="3782709779"/>
+      </p:ext>
+    </p:extLst>
+  </p:cSld>
+  <p:clrMap bg1="lt1" tx1="dk1" bg2="lt2" tx2="dk2" accent1="accent1" accent2="accent2" accent3="accent3" accent4="accent4" accent5="accent5" accent6="accent6" hlink="hlink" folHlink="folHlink"/>
+  <p:notesStyle>
+    <a:lvl1pPr marL="0" algn="l" defTabSz="914400" rtl="0" eaLnBrk="1" latinLnBrk="0" hangingPunct="1">
+      <a:defRPr sz="1200" kern="1200">
+        <a:solidFill>
+          <a:schemeClr val="tx1"/>
+        </a:solidFill>
+        <a:latin typeface="+mn-lt"/>
+        <a:ea typeface="+mn-ea"/>
+        <a:cs typeface="+mn-cs"/>
+      </a:defRPr>
+    </a:lvl1pPr>
+    <a:lvl2pPr marL="457200" algn="l" defTabSz="914400" rtl="0" eaLnBrk="1" latinLnBrk="0" hangingPunct="1">
+      <a:defRPr sz="1200" kern="1200">
+        <a:solidFill>
+          <a:schemeClr val="tx1"/>
+        </a:solidFill>
+        <a:latin typeface="+mn-lt"/>
+        <a:ea typeface="+mn-ea"/>
+        <a:cs typeface="+mn-cs"/>
+      </a:defRPr>
+    </a:lvl2pPr>
+    <a:lvl3pPr marL="914400" algn="l" defTabSz="914400" rtl="0" eaLnBrk="1" latinLnBrk="0" hangingPunct="1">
+      <a:defRPr sz="1200" kern="1200">
+        <a:solidFill>
+          <a:schemeClr val="tx1"/>
+        </a:solidFill>
+        <a:latin typeface="+mn-lt"/>
+        <a:ea typeface="+mn-ea"/>
+        <a:cs typeface="+mn-cs"/>
+      </a:defRPr>
+    </a:lvl3pPr>
+    <a:lvl4pPr marL="1371600" algn="l" defTabSz="914400" rtl="0" eaLnBrk="1" latinLnBrk="0" hangingPunct="1">
+      <a:defRPr sz="1200" kern="1200">
+        <a:solidFill>
+          <a:schemeClr val="tx1"/>
+        </a:solidFill>
+        <a:latin typeface="+mn-lt"/>
+        <a:ea typeface="+mn-ea"/>
+        <a:cs typeface="+mn-cs"/>
+      </a:defRPr>
+    </a:lvl4pPr>
+    <a:lvl5pPr marL="1828800" algn="l" defTabSz="914400" rtl="0" eaLnBrk="1" latinLnBrk="0" hangingPunct="1">
+      <a:defRPr sz="1200" kern="1200">
+        <a:solidFill>
+          <a:schemeClr val="tx1"/>
+        </a:solidFill>
+        <a:latin typeface="+mn-lt"/>
+        <a:ea typeface="+mn-ea"/>
+        <a:cs typeface="+mn-cs"/>
+      </a:defRPr>
+    </a:lvl5pPr>
+    <a:lvl6pPr marL="2286000" algn="l" defTabSz="914400" rtl="0" eaLnBrk="1" latinLnBrk="0" hangingPunct="1">
+      <a:defRPr sz="1200" kern="1200">
+        <a:solidFill>
+          <a:schemeClr val="tx1"/>
+        </a:solidFill>
+        <a:latin typeface="+mn-lt"/>
+        <a:ea typeface="+mn-ea"/>
+        <a:cs typeface="+mn-cs"/>
+      </a:defRPr>
+    </a:lvl6pPr>
+    <a:lvl7pPr marL="2743200" algn="l" defTabSz="914400" rtl="0" eaLnBrk="1" latinLnBrk="0" hangingPunct="1">
+      <a:defRPr sz="1200" kern="1200">
+        <a:solidFill>
+          <a:schemeClr val="tx1"/>
+        </a:solidFill>
+        <a:latin typeface="+mn-lt"/>
+        <a:ea typeface="+mn-ea"/>
+        <a:cs typeface="+mn-cs"/>
+      </a:defRPr>
+    </a:lvl7pPr>
+    <a:lvl8pPr marL="3200400" algn="l" defTabSz="914400" rtl="0" eaLnBrk="1" latinLnBrk="0" hangingPunct="1">
+      <a:defRPr sz="1200" kern="1200">
+        <a:solidFill>
+          <a:schemeClr val="tx1"/>
+        </a:solidFill>
+        <a:latin typeface="+mn-lt"/>
+        <a:ea typeface="+mn-ea"/>
+        <a:cs typeface="+mn-cs"/>
+      </a:defRPr>
+    </a:lvl8pPr>
+    <a:lvl9pPr marL="3657600" algn="l" defTabSz="914400" rtl="0" eaLnBrk="1" latinLnBrk="0" hangingPunct="1">
+      <a:defRPr sz="1200" kern="1200">
+        <a:solidFill>
+          <a:schemeClr val="tx1"/>
+        </a:solidFill>
+        <a:latin typeface="+mn-lt"/>
+        <a:ea typeface="+mn-ea"/>
+        <a:cs typeface="+mn-cs"/>
+      </a:defRPr>
+    </a:lvl9pPr>
+  </p:notesStyle>
+</p:notesMaster>
+</file>
+
+<file path=ppt/notesSlides/notesSlide1.xml><?xml version="1.0" encoding="utf-8"?>
+<p:notes xmlns:a="http://schemas.openxmlformats.org/drawingml/2006/main" xmlns:r="http://schemas.openxmlformats.org/officeDocument/2006/relationships" xmlns:p="http://schemas.openxmlformats.org/presentationml/2006/main">
+  <p:cSld>
+    <p:spTree>
+      <p:nvGrpSpPr>
+        <p:cNvPr id="1" name=""/>
+        <p:cNvGrpSpPr/>
+        <p:nvPr/>
+      </p:nvGrpSpPr>
+      <p:grpSpPr>
+        <a:xfrm>
+          <a:off x="0" y="0"/>
+          <a:ext cx="0" cy="0"/>
+          <a:chOff x="0" y="0"/>
+          <a:chExt cx="0" cy="0"/>
+        </a:xfrm>
+      </p:grpSpPr>
+      <p:sp>
+        <p:nvSpPr>
+          <p:cNvPr id="2" name="Slide Image Placeholder 1"/>
+          <p:cNvSpPr>
+            <a:spLocks noGrp="1" noRot="1" noChangeAspect="1"/>
+          </p:cNvSpPr>
+          <p:nvPr>
+            <p:ph type="sldImg"/>
+          </p:nvPr>
+        </p:nvSpPr>
+        <p:spPr/>
+      </p:sp>
+      <p:sp>
+        <p:nvSpPr>
+          <p:cNvPr id="3" name="Notes Placeholder 2"/>
+          <p:cNvSpPr>
+            <a:spLocks noGrp="1"/>
+          </p:cNvSpPr>
+          <p:nvPr>
+            <p:ph type="body" idx="1"/>
+          </p:nvPr>
+        </p:nvSpPr>
+        <p:spPr/>
+        <p:txBody>
+          <a:bodyPr/>
+          <a:lstStyle/>
+          <a:p>
+            <a:pPr lvl="0"/>
+            <a:r>
+              <a:rPr/>
+              <a:t>Leads and approves the corporate data strategy, data governance framework, and data policies.</a:t>
+            </a:r>
+          </a:p>
+          <a:p>
+            <a:pPr lvl="0" indent="0" marL="0">
+              <a:buNone/>
+            </a:pPr>
+          </a:p>
+          <a:p>
+            <a:pPr lvl="0"/>
+            <a:r>
+              <a:rPr/>
+              <a:t>Reviews local data policies while allowing departments the flexibility to tailor their own approaches.</a:t>
+            </a:r>
+          </a:p>
+          <a:p>
+            <a:pPr lvl="0" indent="0" marL="0">
+              <a:buNone/>
+            </a:pPr>
+          </a:p>
+          <a:p>
+            <a:pPr lvl="0"/>
+            <a:r>
+              <a:rPr/>
+              <a:t>Sets priorities for corporate actions and promotes collaboration in implementing the strategy.</a:t>
+            </a:r>
+          </a:p>
+          <a:p>
+            <a:pPr lvl="0" indent="0" marL="0">
+              <a:buNone/>
+            </a:pPr>
+          </a:p>
+          <a:p>
+            <a:pPr lvl="0"/>
+            <a:r>
+              <a:rPr/>
+              <a:t>Makes strategic decisions that cannot be resolved at managerial or operational levels.</a:t>
+            </a:r>
+          </a:p>
+          <a:p>
+            <a:pPr lvl="0" indent="0" marL="0">
+              <a:buNone/>
+            </a:pPr>
+          </a:p>
+          <a:p>
+            <a:pPr lvl="0"/>
+            <a:r>
+              <a:rPr/>
+              <a:t>Monitors policy implementation and coordinates with data governance partners when needed.</a:t>
+            </a:r>
+          </a:p>
+          <a:p>
+            <a:pPr lvl="0" indent="0" marL="0">
+              <a:buNone/>
+            </a:pPr>
+          </a:p>
+          <a:p>
+            <a:pPr lvl="0"/>
+            <a:r>
+              <a:rPr/>
+              <a:t>Promotes strong data governance practices and gives visibility to related initiatives.</a:t>
+            </a:r>
+          </a:p>
+          <a:p>
+            <a:pPr lvl="0" indent="0" marL="0">
+              <a:buNone/>
+            </a:pPr>
+          </a:p>
+          <a:p>
+            <a:pPr lvl="0"/>
+            <a:r>
+              <a:rPr/>
+              <a:t>Requests contributions from departments and governance partners to support or implement data policies.</a:t>
+            </a:r>
+          </a:p>
+          <a:p>
+            <a:pPr lvl="0" indent="0" marL="0">
+              <a:buNone/>
+            </a:pPr>
+          </a:p>
+          <a:p>
+            <a:pPr lvl="0"/>
+            <a:r>
+              <a:rPr/>
+              <a:t>Advises the Information Technology and Cybersecurity Board on data policy matters.</a:t>
+            </a:r>
+          </a:p>
+          <a:p>
+            <a:pPr lvl="0" indent="0" marL="0">
+              <a:buNone/>
+            </a:pPr>
+          </a:p>
+          <a:p>
+            <a:pPr lvl="0"/>
+            <a:r>
+              <a:rPr/>
+              <a:t>Considers required human and financial resources for developing and maintaining data governance and policies.</a:t>
+            </a:r>
+          </a:p>
+        </p:txBody>
+      </p:sp>
+      <p:sp>
+        <p:nvSpPr>
+          <p:cNvPr id="4" name="Slide Number Placeholder 3"/>
+          <p:cNvSpPr>
+            <a:spLocks noGrp="1"/>
+          </p:cNvSpPr>
+          <p:nvPr>
+            <p:ph type="sldNum" sz="quarter" idx="10"/>
+          </p:nvPr>
+        </p:nvSpPr>
+        <p:spPr/>
+        <p:txBody>
+          <a:bodyPr/>
+          <a:lstStyle/>
+          <a:p>
+            <a:fld id="{18BDFEC3-8487-43E8-A154-7C12CBC1FFF2}" type="slidenum">
+              <a:rPr lang="en-US"/>
+              <a:t>7</a:t>
+            </a:fld>
+            <a:endParaRPr lang="en-US"/>
+          </a:p>
+        </p:txBody>
+      </p:sp>
+    </p:spTree>
+  </p:cSld>
+</p:notes>
+</file>
+
+<file path=ppt/notesSlides/notesSlide2.xml><?xml version="1.0" encoding="utf-8"?>
+<p:notes xmlns:a="http://schemas.openxmlformats.org/drawingml/2006/main" xmlns:r="http://schemas.openxmlformats.org/officeDocument/2006/relationships" xmlns:p="http://schemas.openxmlformats.org/presentationml/2006/main">
+  <p:cSld>
+    <p:spTree>
+      <p:nvGrpSpPr>
+        <p:cNvPr id="1" name=""/>
+        <p:cNvGrpSpPr/>
+        <p:nvPr/>
+      </p:nvGrpSpPr>
+      <p:grpSpPr>
+        <a:xfrm>
+          <a:off x="0" y="0"/>
+          <a:ext cx="0" cy="0"/>
+          <a:chOff x="0" y="0"/>
+          <a:chExt cx="0" cy="0"/>
+        </a:xfrm>
+      </p:grpSpPr>
+      <p:sp>
+        <p:nvSpPr>
+          <p:cNvPr id="2" name="Slide Image Placeholder 1"/>
+          <p:cNvSpPr>
+            <a:spLocks noGrp="1" noRot="1" noChangeAspect="1"/>
+          </p:cNvSpPr>
+          <p:nvPr>
+            <p:ph type="sldImg"/>
+          </p:nvPr>
+        </p:nvSpPr>
+        <p:spPr/>
+      </p:sp>
+      <p:sp>
+        <p:nvSpPr>
+          <p:cNvPr id="3" name="Notes Placeholder 2"/>
+          <p:cNvSpPr>
+            <a:spLocks noGrp="1"/>
+          </p:cNvSpPr>
+          <p:nvPr>
+            <p:ph type="body" idx="1"/>
+          </p:nvPr>
+        </p:nvSpPr>
+        <p:spPr/>
+        <p:txBody>
+          <a:bodyPr/>
+          <a:lstStyle/>
+          <a:p>
+            <a:pPr lvl="0"/>
+            <a:r>
+              <a:rPr/>
+              <a:t>Various committees, networks, and communities have been created to improve coordination on data issues and support the implementation of data policies within the Commission.</a:t>
+            </a:r>
+          </a:p>
+          <a:p>
+            <a:pPr lvl="0" indent="0" marL="0">
+              <a:buNone/>
+            </a:pPr>
+          </a:p>
+          <a:p>
+            <a:pPr lvl="0"/>
+            <a:r>
+              <a:rPr/>
+              <a:t>These groups function as </a:t>
+            </a:r>
+            <a:r>
+              <a:rPr b="1"/>
+              <a:t>data coordination groups</a:t>
+            </a:r>
+            <a:r>
+              <a:rPr/>
+              <a:t> within the corporate data governance framework.</a:t>
+            </a:r>
+          </a:p>
+          <a:p>
+            <a:pPr lvl="0" indent="0" marL="0">
+              <a:buNone/>
+            </a:pPr>
+          </a:p>
+          <a:p>
+            <a:pPr lvl="0"/>
+            <a:r>
+              <a:rPr/>
+              <a:t>A data coordination group can be any formal or informal body focused on data-related topics and must have a clearly defined mandate approved by the requesting DGs/services.</a:t>
+            </a:r>
+          </a:p>
+          <a:p>
+            <a:pPr lvl="0" indent="0" marL="0">
+              <a:buNone/>
+            </a:pPr>
+          </a:p>
+          <a:p>
+            <a:pPr lvl="0"/>
+            <a:r>
+              <a:rPr/>
+              <a:t>Some groups are permanent, while others operate for a limited time.</a:t>
+            </a:r>
+          </a:p>
+          <a:p>
+            <a:pPr lvl="0" indent="0" marL="0">
+              <a:buNone/>
+            </a:pPr>
+          </a:p>
+          <a:p>
+            <a:pPr lvl="0"/>
+            <a:r>
+              <a:rPr/>
+              <a:t>The IMSB oversees all existing groups and should be consulted before new groups are created.</a:t>
+            </a:r>
+          </a:p>
+        </p:txBody>
+      </p:sp>
+      <p:sp>
+        <p:nvSpPr>
+          <p:cNvPr id="4" name="Slide Number Placeholder 3"/>
+          <p:cNvSpPr>
+            <a:spLocks noGrp="1"/>
+          </p:cNvSpPr>
+          <p:nvPr>
+            <p:ph type="sldNum" sz="quarter" idx="10"/>
+          </p:nvPr>
+        </p:nvSpPr>
+        <p:spPr/>
+        <p:txBody>
+          <a:bodyPr/>
+          <a:lstStyle/>
+          <a:p>
+            <a:fld id="{18BDFEC3-8487-43E8-A154-7C12CBC1FFF2}" type="slidenum">
+              <a:rPr lang="en-US"/>
+              <a:t>8</a:t>
+            </a:fld>
+            <a:endParaRPr lang="en-US"/>
+          </a:p>
+        </p:txBody>
+      </p:sp>
+    </p:spTree>
+  </p:cSld>
+</p:notes>
 </file>
 
 <file path=ppt/slideLayouts/slideLayout1.xml><?xml version="1.0" encoding="utf-8"?>
@@ -3149,6 +3825,1101 @@
             </a:r>
             <a:br/>
             <a:br/>
+          </a:p>
+        </p:txBody>
+      </p:sp>
+    </p:spTree>
+  </p:cSld>
+</p:sld>
+</file>
+
+<file path=ppt/slides/slide10.xml><?xml version="1.0" encoding="utf-8"?>
+<p:sld xmlns:a="http://schemas.openxmlformats.org/drawingml/2006/main" xmlns:r="http://schemas.openxmlformats.org/officeDocument/2006/relationships" xmlns:p="http://schemas.openxmlformats.org/presentationml/2006/main">
+  <p:cSld>
+    <p:spTree>
+      <p:nvGrpSpPr>
+        <p:cNvPr id="1" name=""/>
+        <p:cNvGrpSpPr/>
+        <p:nvPr/>
+      </p:nvGrpSpPr>
+      <p:grpSpPr>
+        <a:xfrm>
+          <a:off x="0" y="0"/>
+          <a:ext cx="0" cy="0"/>
+          <a:chOff x="0" y="0"/>
+          <a:chExt cx="0" cy="0"/>
+        </a:xfrm>
+      </p:grpSpPr>
+      <p:sp>
+        <p:nvSpPr>
+          <p:cNvPr id="2" name="Title 1"/>
+          <p:cNvSpPr>
+            <a:spLocks noGrp="1"/>
+          </p:cNvSpPr>
+          <p:nvPr>
+            <p:ph type="title"/>
+          </p:nvPr>
+        </p:nvSpPr>
+        <p:spPr/>
+        <p:txBody>
+          <a:bodyPr/>
+          <a:lstStyle/>
+          <a:p>
+            <a:pPr lvl="0" indent="0" marL="0">
+              <a:buNone/>
+            </a:pPr>
+            <a:r>
+              <a:rPr/>
+              <a:t>Individual roles - Local data correspondent</a:t>
+            </a:r>
+          </a:p>
+        </p:txBody>
+      </p:sp>
+      <p:sp>
+        <p:nvSpPr>
+          <p:cNvPr id="3" name="Content Placeholder 2"/>
+          <p:cNvSpPr>
+            <a:spLocks noGrp="1"/>
+          </p:cNvSpPr>
+          <p:nvPr>
+            <p:ph idx="1"/>
+          </p:nvPr>
+        </p:nvSpPr>
+        <p:spPr/>
+        <p:txBody>
+          <a:bodyPr/>
+          <a:lstStyle/>
+          <a:p>
+            <a:pPr lvl="0"/>
+            <a:r>
+              <a:rPr/>
+              <a:t>Acts as the main point of contact for data management within their DG/service.</a:t>
+            </a:r>
+          </a:p>
+          <a:p>
+            <a:pPr lvl="0"/>
+            <a:r>
+              <a:rPr/>
+              <a:t>The role may be shared or delegated to multiple people based on the department’s size and needs.</a:t>
+            </a:r>
+          </a:p>
+          <a:p>
+            <a:pPr lvl="0"/>
+            <a:r>
+              <a:rPr/>
+              <a:t>DGs/services may establish local data governance teams to help implement data governance and data policies, providing support to the LDCs.</a:t>
+            </a:r>
+          </a:p>
+        </p:txBody>
+      </p:sp>
+    </p:spTree>
+  </p:cSld>
+</p:sld>
+</file>
+
+<file path=ppt/slides/slide11.xml><?xml version="1.0" encoding="utf-8"?>
+<p:sld xmlns:a="http://schemas.openxmlformats.org/drawingml/2006/main" xmlns:r="http://schemas.openxmlformats.org/officeDocument/2006/relationships" xmlns:p="http://schemas.openxmlformats.org/presentationml/2006/main">
+  <p:cSld>
+    <p:spTree>
+      <p:nvGrpSpPr>
+        <p:cNvPr id="1" name=""/>
+        <p:cNvGrpSpPr/>
+        <p:nvPr/>
+      </p:nvGrpSpPr>
+      <p:grpSpPr>
+        <a:xfrm>
+          <a:off x="0" y="0"/>
+          <a:ext cx="0" cy="0"/>
+          <a:chOff x="0" y="0"/>
+          <a:chExt cx="0" cy="0"/>
+        </a:xfrm>
+      </p:grpSpPr>
+      <p:sp>
+        <p:nvSpPr>
+          <p:cNvPr id="2" name="Title 1"/>
+          <p:cNvSpPr>
+            <a:spLocks noGrp="1"/>
+          </p:cNvSpPr>
+          <p:nvPr>
+            <p:ph type="title"/>
+          </p:nvPr>
+        </p:nvSpPr>
+        <p:spPr/>
+        <p:txBody>
+          <a:bodyPr/>
+          <a:lstStyle/>
+          <a:p>
+            <a:pPr lvl="0" indent="0" marL="0">
+              <a:buNone/>
+            </a:pPr>
+            <a:r>
+              <a:rPr/>
+              <a:t>Individual roles - data owner</a:t>
+            </a:r>
+          </a:p>
+        </p:txBody>
+      </p:sp>
+      <p:sp>
+        <p:nvSpPr>
+          <p:cNvPr id="3" name="Content Placeholder 2"/>
+          <p:cNvSpPr>
+            <a:spLocks noGrp="1"/>
+          </p:cNvSpPr>
+          <p:nvPr>
+            <p:ph idx="1"/>
+          </p:nvPr>
+        </p:nvSpPr>
+        <p:spPr/>
+        <p:txBody>
+          <a:bodyPr/>
+          <a:lstStyle/>
+          <a:p>
+            <a:pPr lvl="0"/>
+            <a:r>
+              <a:rPr/>
+              <a:t>Data owners are managers or staff appointed by strategic leadership to take responsibility for a specific data domain or data asset.</a:t>
+            </a:r>
+          </a:p>
+          <a:p>
+            <a:pPr lvl="0"/>
+            <a:r>
+              <a:rPr/>
+              <a:t>The term refers to business owners of data, not IT system owners or providers.</a:t>
+            </a:r>
+          </a:p>
+          <a:p>
+            <a:pPr lvl="0"/>
+            <a:r>
+              <a:rPr/>
+              <a:t>Every data asset must have a clearly designated data owner.</a:t>
+            </a:r>
+          </a:p>
+          <a:p>
+            <a:pPr lvl="0"/>
+            <a:r>
+              <a:rPr/>
+              <a:t>Data domains may also have one or more designated owners.</a:t>
+            </a:r>
+          </a:p>
+        </p:txBody>
+      </p:sp>
+    </p:spTree>
+  </p:cSld>
+</p:sld>
+</file>
+
+<file path=ppt/slides/slide12.xml><?xml version="1.0" encoding="utf-8"?>
+<p:sld xmlns:a="http://schemas.openxmlformats.org/drawingml/2006/main" xmlns:r="http://schemas.openxmlformats.org/officeDocument/2006/relationships" xmlns:p="http://schemas.openxmlformats.org/presentationml/2006/main">
+  <p:cSld>
+    <p:spTree>
+      <p:nvGrpSpPr>
+        <p:cNvPr id="1" name=""/>
+        <p:cNvGrpSpPr/>
+        <p:nvPr/>
+      </p:nvGrpSpPr>
+      <p:grpSpPr>
+        <a:xfrm>
+          <a:off x="0" y="0"/>
+          <a:ext cx="0" cy="0"/>
+          <a:chOff x="0" y="0"/>
+          <a:chExt cx="0" cy="0"/>
+        </a:xfrm>
+      </p:grpSpPr>
+      <p:sp>
+        <p:nvSpPr>
+          <p:cNvPr id="2" name="Title 1"/>
+          <p:cNvSpPr>
+            <a:spLocks noGrp="1"/>
+          </p:cNvSpPr>
+          <p:nvPr>
+            <p:ph type="title"/>
+          </p:nvPr>
+        </p:nvSpPr>
+        <p:spPr/>
+        <p:txBody>
+          <a:bodyPr/>
+          <a:lstStyle/>
+          <a:p>
+            <a:pPr lvl="0" indent="0" marL="0">
+              <a:buNone/>
+            </a:pPr>
+            <a:r>
+              <a:rPr/>
+              <a:t>Individual roles - data steward</a:t>
+            </a:r>
+          </a:p>
+        </p:txBody>
+      </p:sp>
+      <p:sp>
+        <p:nvSpPr>
+          <p:cNvPr id="3" name="Content Placeholder 2"/>
+          <p:cNvSpPr>
+            <a:spLocks noGrp="1"/>
+          </p:cNvSpPr>
+          <p:nvPr>
+            <p:ph idx="1"/>
+          </p:nvPr>
+        </p:nvSpPr>
+        <p:spPr/>
+        <p:txBody>
+          <a:bodyPr/>
+          <a:lstStyle/>
+          <a:p>
+            <a:pPr lvl="0"/>
+            <a:r>
+              <a:rPr/>
+              <a:t>Data stewards are subject matter experts for a specific data domain or data asset.</a:t>
+            </a:r>
+          </a:p>
+          <a:p>
+            <a:pPr lvl="0"/>
+            <a:r>
+              <a:rPr/>
+              <a:t>They are appointed by, and support, the designated data owner.</a:t>
+            </a:r>
+          </a:p>
+          <a:p>
+            <a:pPr lvl="0"/>
+            <a:r>
+              <a:rPr/>
+              <a:t>Data stewards may operate beyond their own organisational unit if needed.</a:t>
+            </a:r>
+          </a:p>
+          <a:p>
+            <a:pPr lvl="0"/>
+            <a:r>
+              <a:rPr/>
+              <a:t>They often work with specialised data architects on tasks such as data modelling and communicating data requirements to IT teams.</a:t>
+            </a:r>
+          </a:p>
+        </p:txBody>
+      </p:sp>
+    </p:spTree>
+  </p:cSld>
+</p:sld>
+</file>
+
+<file path=ppt/slides/slide13.xml><?xml version="1.0" encoding="utf-8"?>
+<p:sld xmlns:a="http://schemas.openxmlformats.org/drawingml/2006/main" xmlns:r="http://schemas.openxmlformats.org/officeDocument/2006/relationships" xmlns:p="http://schemas.openxmlformats.org/presentationml/2006/main">
+  <p:cSld>
+    <p:spTree>
+      <p:nvGrpSpPr>
+        <p:cNvPr id="1" name=""/>
+        <p:cNvGrpSpPr/>
+        <p:nvPr/>
+      </p:nvGrpSpPr>
+      <p:grpSpPr>
+        <a:xfrm>
+          <a:off x="0" y="0"/>
+          <a:ext cx="0" cy="0"/>
+          <a:chOff x="0" y="0"/>
+          <a:chExt cx="0" cy="0"/>
+        </a:xfrm>
+      </p:grpSpPr>
+      <p:sp>
+        <p:nvSpPr>
+          <p:cNvPr id="2" name="Title 1"/>
+          <p:cNvSpPr>
+            <a:spLocks noGrp="1"/>
+          </p:cNvSpPr>
+          <p:nvPr>
+            <p:ph type="title"/>
+          </p:nvPr>
+        </p:nvSpPr>
+        <p:spPr/>
+        <p:txBody>
+          <a:bodyPr/>
+          <a:lstStyle/>
+          <a:p>
+            <a:pPr lvl="0" indent="0" marL="0">
+              <a:buNone/>
+            </a:pPr>
+            <a:r>
+              <a:rPr/>
+              <a:t>Individual roles - data user</a:t>
+            </a:r>
+          </a:p>
+        </p:txBody>
+      </p:sp>
+      <p:sp>
+        <p:nvSpPr>
+          <p:cNvPr id="3" name="Content Placeholder 2"/>
+          <p:cNvSpPr>
+            <a:spLocks noGrp="1"/>
+          </p:cNvSpPr>
+          <p:nvPr>
+            <p:ph idx="1"/>
+          </p:nvPr>
+        </p:nvSpPr>
+        <p:spPr/>
+        <p:txBody>
+          <a:bodyPr/>
+          <a:lstStyle/>
+          <a:p>
+            <a:pPr lvl="0"/>
+            <a:r>
+              <a:rPr b="1"/>
+              <a:t>Policy staff</a:t>
+            </a:r>
+            <a:r>
+              <a:rPr/>
+              <a:t> who use data to support policy development and decision-making.</a:t>
+            </a:r>
+          </a:p>
+          <a:p>
+            <a:pPr lvl="0"/>
+            <a:r>
+              <a:rPr b="1"/>
+              <a:t>Data analysts</a:t>
+            </a:r>
+            <a:r>
+              <a:rPr/>
+              <a:t> who analyse, integrate, and visualise data to generate insights.</a:t>
+            </a:r>
+          </a:p>
+          <a:p>
+            <a:pPr lvl="0"/>
+            <a:r>
+              <a:rPr b="1"/>
+              <a:t>Data or information architects</a:t>
+            </a:r>
+            <a:r>
+              <a:rPr/>
+              <a:t> who design models and architectures for managing and using data.</a:t>
+            </a:r>
+          </a:p>
+          <a:p>
+            <a:pPr lvl="0"/>
+            <a:r>
+              <a:rPr b="1"/>
+              <a:t>Data engineers</a:t>
+            </a:r>
+            <a:r>
+              <a:rPr/>
+              <a:t> who clean, integrate, and prepare data for analysis and help define data architectures.</a:t>
+            </a:r>
+          </a:p>
+          <a:p>
+            <a:pPr lvl="0"/>
+            <a:r>
+              <a:rPr b="1"/>
+              <a:t>Data scientists</a:t>
+            </a:r>
+            <a:r>
+              <a:rPr/>
+              <a:t> who analyse large datasets using statistics, advanced analytics, machine learning, and AI to identify patterns and insights.</a:t>
+            </a:r>
+          </a:p>
+          <a:p>
+            <a:pPr lvl="0"/>
+            <a:r>
+              <a:rPr b="1"/>
+              <a:t>Software developers</a:t>
+            </a:r>
+            <a:r>
+              <a:rPr/>
+              <a:t> who build data pipelines, implement data architectures, create data access interfaces, and embed data policies in IT systems.</a:t>
+            </a:r>
+          </a:p>
+        </p:txBody>
+      </p:sp>
+    </p:spTree>
+  </p:cSld>
+</p:sld>
+</file>
+
+<file path=ppt/slides/slide2.xml><?xml version="1.0" encoding="utf-8"?>
+<p:sld xmlns:a="http://schemas.openxmlformats.org/drawingml/2006/main" xmlns:r="http://schemas.openxmlformats.org/officeDocument/2006/relationships" xmlns:p="http://schemas.openxmlformats.org/presentationml/2006/main">
+  <p:cSld>
+    <p:spTree>
+      <p:nvGrpSpPr>
+        <p:cNvPr id="1" name=""/>
+        <p:cNvGrpSpPr/>
+        <p:nvPr/>
+      </p:nvGrpSpPr>
+      <p:grpSpPr>
+        <a:xfrm>
+          <a:off x="0" y="0"/>
+          <a:ext cx="0" cy="0"/>
+          <a:chOff x="0" y="0"/>
+          <a:chExt cx="0" cy="0"/>
+        </a:xfrm>
+      </p:grpSpPr>
+      <p:sp>
+        <p:nvSpPr>
+          <p:cNvPr id="2" name="Title 1"/>
+          <p:cNvSpPr>
+            <a:spLocks noGrp="1"/>
+          </p:cNvSpPr>
+          <p:nvPr>
+            <p:ph type="title"/>
+          </p:nvPr>
+        </p:nvSpPr>
+        <p:spPr/>
+        <p:txBody>
+          <a:bodyPr/>
+          <a:lstStyle/>
+          <a:p>
+            <a:pPr lvl="0" indent="0" marL="0">
+              <a:buNone/>
+            </a:pPr>
+            <a:r>
+              <a:rPr/>
+              <a:t>Model of roles and responsibilities for data - University of Oxford</a:t>
+            </a:r>
+          </a:p>
+        </p:txBody>
+      </p:sp>
+      <p:pic>
+        <p:nvPicPr>
+          <p:cNvPr descr="../images/hr_roles_01.jpg" id="0" name="Picture 1"/>
+          <p:cNvPicPr>
+            <a:picLocks noGrp="1" noChangeAspect="1"/>
+          </p:cNvPicPr>
+          <p:nvPr/>
+        </p:nvPicPr>
+        <p:blipFill>
+          <a:blip r:embed="rId2"/>
+          <a:stretch>
+            <a:fillRect/>
+          </a:stretch>
+        </p:blipFill>
+        <p:spPr bwMode="auto">
+          <a:xfrm>
+            <a:off x="825500" y="1193800"/>
+            <a:ext cx="7493000" cy="3390900"/>
+          </a:xfrm>
+          <a:prstGeom prst="rect">
+            <a:avLst/>
+          </a:prstGeom>
+          <a:noFill/>
+          <a:ln w="9525">
+            <a:noFill/>
+            <a:headEnd/>
+            <a:tailEnd/>
+          </a:ln>
+        </p:spPr>
+      </p:pic>
+    </p:spTree>
+  </p:cSld>
+</p:sld>
+</file>
+
+<file path=ppt/slides/slide3.xml><?xml version="1.0" encoding="utf-8"?>
+<p:sld xmlns:a="http://schemas.openxmlformats.org/drawingml/2006/main" xmlns:r="http://schemas.openxmlformats.org/officeDocument/2006/relationships" xmlns:p="http://schemas.openxmlformats.org/presentationml/2006/main">
+  <p:cSld>
+    <p:spTree>
+      <p:nvGrpSpPr>
+        <p:cNvPr id="1" name=""/>
+        <p:cNvGrpSpPr/>
+        <p:nvPr/>
+      </p:nvGrpSpPr>
+      <p:grpSpPr>
+        <a:xfrm>
+          <a:off x="0" y="0"/>
+          <a:ext cx="0" cy="0"/>
+          <a:chOff x="0" y="0"/>
+          <a:chExt cx="0" cy="0"/>
+        </a:xfrm>
+      </p:grpSpPr>
+      <p:sp>
+        <p:nvSpPr>
+          <p:cNvPr id="2" name="Title 1"/>
+          <p:cNvSpPr>
+            <a:spLocks noGrp="1"/>
+          </p:cNvSpPr>
+          <p:nvPr>
+            <p:ph type="title"/>
+          </p:nvPr>
+        </p:nvSpPr>
+        <p:spPr/>
+        <p:txBody>
+          <a:bodyPr/>
+          <a:lstStyle/>
+          <a:p>
+            <a:pPr lvl="0" indent="0" marL="0">
+              <a:buNone/>
+            </a:pPr>
+            <a:r>
+              <a:rPr/>
+              <a:t>Data Executive Group</a:t>
+            </a:r>
+          </a:p>
+        </p:txBody>
+      </p:sp>
+      <p:sp>
+        <p:nvSpPr>
+          <p:cNvPr id="3" name="Content Placeholder 2"/>
+          <p:cNvSpPr>
+            <a:spLocks noGrp="1"/>
+          </p:cNvSpPr>
+          <p:nvPr>
+            <p:ph idx="1"/>
+          </p:nvPr>
+        </p:nvSpPr>
+        <p:spPr/>
+        <p:txBody>
+          <a:bodyPr/>
+          <a:lstStyle/>
+          <a:p>
+            <a:pPr lvl="0"/>
+            <a:r>
+              <a:rPr/>
+              <a:t>Offers overarching strategic guidance and decision-making by:</a:t>
+            </a:r>
+          </a:p>
+          <a:p>
+            <a:pPr lvl="1"/>
+            <a:r>
+              <a:rPr/>
+              <a:t>Establishing policies, accountability, and responsibility for the University’s administrative data.</a:t>
+            </a:r>
+          </a:p>
+          <a:p>
+            <a:pPr lvl="1"/>
+            <a:r>
+              <a:rPr/>
+              <a:t>Continuously evaluating the University’s capacity to meet external obligations and minimise regulatory and statutory risks, while maximising the value of its data for informed decision-making and supporting strategic goals.</a:t>
+            </a:r>
+          </a:p>
+        </p:txBody>
+      </p:sp>
+    </p:spTree>
+  </p:cSld>
+</p:sld>
+</file>
+
+<file path=ppt/slides/slide4.xml><?xml version="1.0" encoding="utf-8"?>
+<p:sld xmlns:a="http://schemas.openxmlformats.org/drawingml/2006/main" xmlns:r="http://schemas.openxmlformats.org/officeDocument/2006/relationships" xmlns:p="http://schemas.openxmlformats.org/presentationml/2006/main">
+  <p:cSld>
+    <p:spTree>
+      <p:nvGrpSpPr>
+        <p:cNvPr id="1" name=""/>
+        <p:cNvGrpSpPr/>
+        <p:nvPr/>
+      </p:nvGrpSpPr>
+      <p:grpSpPr>
+        <a:xfrm>
+          <a:off x="0" y="0"/>
+          <a:ext cx="0" cy="0"/>
+          <a:chOff x="0" y="0"/>
+          <a:chExt cx="0" cy="0"/>
+        </a:xfrm>
+      </p:grpSpPr>
+      <p:sp>
+        <p:nvSpPr>
+          <p:cNvPr id="2" name="Title 1"/>
+          <p:cNvSpPr>
+            <a:spLocks noGrp="1"/>
+          </p:cNvSpPr>
+          <p:nvPr>
+            <p:ph type="title"/>
+          </p:nvPr>
+        </p:nvSpPr>
+        <p:spPr/>
+        <p:txBody>
+          <a:bodyPr/>
+          <a:lstStyle/>
+          <a:p>
+            <a:pPr lvl="0" indent="0" marL="0">
+              <a:buNone/>
+            </a:pPr>
+            <a:r>
+              <a:rPr/>
+              <a:t>Data Governance Group</a:t>
+            </a:r>
+          </a:p>
+        </p:txBody>
+      </p:sp>
+      <p:sp>
+        <p:nvSpPr>
+          <p:cNvPr id="3" name="Content Placeholder 2"/>
+          <p:cNvSpPr>
+            <a:spLocks noGrp="1"/>
+          </p:cNvSpPr>
+          <p:nvPr>
+            <p:ph idx="1"/>
+          </p:nvPr>
+        </p:nvSpPr>
+        <p:spPr/>
+        <p:txBody>
+          <a:bodyPr/>
+          <a:lstStyle/>
+          <a:p>
+            <a:pPr lvl="0"/>
+            <a:r>
+              <a:rPr/>
+              <a:t>Oversees governance policies and ensures they are followed by:</a:t>
+            </a:r>
+          </a:p>
+          <a:p>
+            <a:pPr lvl="1"/>
+            <a:r>
+              <a:rPr/>
+              <a:t>Making sure the Data Operating Model and core data governance and quality activities give clear guidance to all data users, whether they analyse, report on, or consume data.</a:t>
+            </a:r>
+          </a:p>
+          <a:p>
+            <a:pPr lvl="1"/>
+            <a:r>
+              <a:rPr/>
+              <a:t>Supporting improved accuracy, confidence, and efficiency in data reuse, reporting, and decision-making.</a:t>
+            </a:r>
+          </a:p>
+        </p:txBody>
+      </p:sp>
+    </p:spTree>
+  </p:cSld>
+</p:sld>
+</file>
+
+<file path=ppt/slides/slide5.xml><?xml version="1.0" encoding="utf-8"?>
+<p:sld xmlns:a="http://schemas.openxmlformats.org/drawingml/2006/main" xmlns:r="http://schemas.openxmlformats.org/officeDocument/2006/relationships" xmlns:p="http://schemas.openxmlformats.org/presentationml/2006/main">
+  <p:cSld>
+    <p:spTree>
+      <p:nvGrpSpPr>
+        <p:cNvPr id="1" name=""/>
+        <p:cNvGrpSpPr/>
+        <p:nvPr/>
+      </p:nvGrpSpPr>
+      <p:grpSpPr>
+        <a:xfrm>
+          <a:off x="0" y="0"/>
+          <a:ext cx="0" cy="0"/>
+          <a:chOff x="0" y="0"/>
+          <a:chExt cx="0" cy="0"/>
+        </a:xfrm>
+      </p:grpSpPr>
+      <p:sp>
+        <p:nvSpPr>
+          <p:cNvPr id="2" name="Title 1"/>
+          <p:cNvSpPr>
+            <a:spLocks noGrp="1"/>
+          </p:cNvSpPr>
+          <p:nvPr>
+            <p:ph type="title"/>
+          </p:nvPr>
+        </p:nvSpPr>
+        <p:spPr/>
+        <p:txBody>
+          <a:bodyPr/>
+          <a:lstStyle/>
+          <a:p>
+            <a:pPr lvl="0" indent="0" marL="0">
+              <a:buNone/>
+            </a:pPr>
+            <a:r>
+              <a:rPr/>
+              <a:t>Data subject matter experts</a:t>
+            </a:r>
+          </a:p>
+        </p:txBody>
+      </p:sp>
+      <p:sp>
+        <p:nvSpPr>
+          <p:cNvPr id="3" name="Content Placeholder 2"/>
+          <p:cNvSpPr>
+            <a:spLocks noGrp="1"/>
+          </p:cNvSpPr>
+          <p:nvPr>
+            <p:ph idx="1"/>
+          </p:nvPr>
+        </p:nvSpPr>
+        <p:spPr/>
+        <p:txBody>
+          <a:bodyPr/>
+          <a:lstStyle/>
+          <a:p>
+            <a:pPr lvl="0"/>
+            <a:r>
+              <a:rPr/>
+              <a:t>Handle data in their daily roles such as creating, using, storing, defining, managing, or deleting it. They are responsible for:</a:t>
+            </a:r>
+          </a:p>
+          <a:p>
+            <a:pPr lvl="1"/>
+            <a:r>
+              <a:rPr/>
+              <a:t>Reporting data governance progress and challenges to the Data Governance Team.</a:t>
+            </a:r>
+          </a:p>
+          <a:p>
+            <a:pPr lvl="1"/>
+            <a:r>
+              <a:rPr/>
+              <a:t>Ensuring data integrity and security, and adhering to organisational policies and regulatory requirements.</a:t>
+            </a:r>
+          </a:p>
+          <a:p>
+            <a:pPr lvl="1"/>
+            <a:r>
+              <a:rPr/>
+              <a:t>Applying best practices, maintaining data quality, addressing data issues, and supporting accurate, timely reporting.</a:t>
+            </a:r>
+          </a:p>
+          <a:p>
+            <a:pPr lvl="1"/>
+            <a:r>
+              <a:rPr/>
+              <a:t>Promoting collaboration between business and technical teams to support effective, data-informed decision-making.</a:t>
+            </a:r>
+          </a:p>
+        </p:txBody>
+      </p:sp>
+    </p:spTree>
+  </p:cSld>
+</p:sld>
+</file>
+
+<file path=ppt/slides/slide6.xml><?xml version="1.0" encoding="utf-8"?>
+<p:sld xmlns:a="http://schemas.openxmlformats.org/drawingml/2006/main" xmlns:r="http://schemas.openxmlformats.org/officeDocument/2006/relationships" xmlns:p="http://schemas.openxmlformats.org/presentationml/2006/main">
+  <p:cSld>
+    <p:spTree>
+      <p:nvGrpSpPr>
+        <p:cNvPr id="1" name=""/>
+        <p:cNvGrpSpPr/>
+        <p:nvPr/>
+      </p:nvGrpSpPr>
+      <p:grpSpPr>
+        <a:xfrm>
+          <a:off x="0" y="0"/>
+          <a:ext cx="0" cy="0"/>
+          <a:chOff x="0" y="0"/>
+          <a:chExt cx="0" cy="0"/>
+        </a:xfrm>
+      </p:grpSpPr>
+      <p:sp>
+        <p:nvSpPr>
+          <p:cNvPr id="2" name="Title 1"/>
+          <p:cNvSpPr>
+            <a:spLocks noGrp="1"/>
+          </p:cNvSpPr>
+          <p:nvPr>
+            <p:ph type="title"/>
+          </p:nvPr>
+        </p:nvSpPr>
+        <p:spPr/>
+        <p:txBody>
+          <a:bodyPr/>
+          <a:lstStyle/>
+          <a:p>
+            <a:pPr lvl="0" indent="0" marL="0">
+              <a:buNone/>
+            </a:pPr>
+            <a:r>
+              <a:rPr/>
+              <a:t>Model of roles and responsibilities for data - OECD</a:t>
+            </a:r>
+          </a:p>
+        </p:txBody>
+      </p:sp>
+      <p:pic>
+        <p:nvPicPr>
+          <p:cNvPr descr="../images/hr_roles_02.png" id="0" name="Picture 1"/>
+          <p:cNvPicPr>
+            <a:picLocks noGrp="1" noChangeAspect="1"/>
+          </p:cNvPicPr>
+          <p:nvPr/>
+        </p:nvPicPr>
+        <p:blipFill>
+          <a:blip r:embed="rId2"/>
+          <a:stretch>
+            <a:fillRect/>
+          </a:stretch>
+        </p:blipFill>
+        <p:spPr bwMode="auto">
+          <a:xfrm>
+            <a:off x="812800" y="1193800"/>
+            <a:ext cx="7518400" cy="3390900"/>
+          </a:xfrm>
+          <a:prstGeom prst="rect">
+            <a:avLst/>
+          </a:prstGeom>
+          <a:noFill/>
+          <a:ln w="9525">
+            <a:noFill/>
+            <a:headEnd/>
+            <a:tailEnd/>
+          </a:ln>
+        </p:spPr>
+      </p:pic>
+    </p:spTree>
+  </p:cSld>
+</p:sld>
+</file>
+
+<file path=ppt/slides/slide7.xml><?xml version="1.0" encoding="utf-8"?>
+<p:sld xmlns:a="http://schemas.openxmlformats.org/drawingml/2006/main" xmlns:r="http://schemas.openxmlformats.org/officeDocument/2006/relationships" xmlns:p="http://schemas.openxmlformats.org/presentationml/2006/main">
+  <p:cSld>
+    <p:spTree>
+      <p:nvGrpSpPr>
+        <p:cNvPr id="1" name=""/>
+        <p:cNvGrpSpPr/>
+        <p:nvPr/>
+      </p:nvGrpSpPr>
+      <p:grpSpPr>
+        <a:xfrm>
+          <a:off x="0" y="0"/>
+          <a:ext cx="0" cy="0"/>
+          <a:chOff x="0" y="0"/>
+          <a:chExt cx="0" cy="0"/>
+        </a:xfrm>
+      </p:grpSpPr>
+      <p:sp>
+        <p:nvSpPr>
+          <p:cNvPr id="2" name="Title 1"/>
+          <p:cNvSpPr>
+            <a:spLocks noGrp="1"/>
+          </p:cNvSpPr>
+          <p:nvPr>
+            <p:ph type="title"/>
+          </p:nvPr>
+        </p:nvSpPr>
+        <p:spPr/>
+        <p:txBody>
+          <a:bodyPr/>
+          <a:lstStyle/>
+          <a:p>
+            <a:pPr lvl="0" indent="0" marL="0">
+              <a:buNone/>
+            </a:pPr>
+            <a:r>
+              <a:rPr/>
+              <a:t>Group roles - Information Management Steering Board</a:t>
+            </a:r>
+          </a:p>
+        </p:txBody>
+      </p:sp>
+      <p:sp>
+        <p:nvSpPr>
+          <p:cNvPr id="3" name="Content Placeholder 2"/>
+          <p:cNvSpPr>
+            <a:spLocks noGrp="1"/>
+          </p:cNvSpPr>
+          <p:nvPr>
+            <p:ph idx="1"/>
+          </p:nvPr>
+        </p:nvSpPr>
+        <p:spPr/>
+        <p:txBody>
+          <a:bodyPr/>
+          <a:lstStyle/>
+          <a:p>
+            <a:pPr lvl="0"/>
+            <a:r>
+              <a:rPr/>
+              <a:t>Standing subgroup of the Corporate Management Board.</a:t>
+            </a:r>
+          </a:p>
+          <a:p>
+            <a:pPr lvl="0"/>
+            <a:r>
+              <a:rPr/>
+              <a:t>Helps the Board supervise the implementation of the Commission’s strategy for managing data, information, and knowledge, with support from the Information Management Team.</a:t>
+            </a:r>
+          </a:p>
+        </p:txBody>
+      </p:sp>
+    </p:spTree>
+  </p:cSld>
+</p:sld>
+</file>
+
+<file path=ppt/slides/slide8.xml><?xml version="1.0" encoding="utf-8"?>
+<p:sld xmlns:a="http://schemas.openxmlformats.org/drawingml/2006/main" xmlns:r="http://schemas.openxmlformats.org/officeDocument/2006/relationships" xmlns:p="http://schemas.openxmlformats.org/presentationml/2006/main">
+  <p:cSld>
+    <p:spTree>
+      <p:nvGrpSpPr>
+        <p:cNvPr id="1" name=""/>
+        <p:cNvGrpSpPr/>
+        <p:nvPr/>
+      </p:nvGrpSpPr>
+      <p:grpSpPr>
+        <a:xfrm>
+          <a:off x="0" y="0"/>
+          <a:ext cx="0" cy="0"/>
+          <a:chOff x="0" y="0"/>
+          <a:chExt cx="0" cy="0"/>
+        </a:xfrm>
+      </p:grpSpPr>
+      <p:sp>
+        <p:nvSpPr>
+          <p:cNvPr id="2" name="Title 1"/>
+          <p:cNvSpPr>
+            <a:spLocks noGrp="1"/>
+          </p:cNvSpPr>
+          <p:nvPr>
+            <p:ph type="title"/>
+          </p:nvPr>
+        </p:nvSpPr>
+        <p:spPr/>
+        <p:txBody>
+          <a:bodyPr/>
+          <a:lstStyle/>
+          <a:p>
+            <a:pPr lvl="0" indent="0" marL="0">
+              <a:buNone/>
+            </a:pPr>
+            <a:r>
+              <a:rPr/>
+              <a:t>Group roles - Data coordination groups</a:t>
+            </a:r>
+          </a:p>
+        </p:txBody>
+      </p:sp>
+      <p:sp>
+        <p:nvSpPr>
+          <p:cNvPr id="3" name="Content Placeholder 2"/>
+          <p:cNvSpPr>
+            <a:spLocks noGrp="1"/>
+          </p:cNvSpPr>
+          <p:nvPr>
+            <p:ph idx="1"/>
+          </p:nvPr>
+        </p:nvSpPr>
+        <p:spPr/>
+        <p:txBody>
+          <a:bodyPr/>
+          <a:lstStyle/>
+          <a:p>
+            <a:pPr lvl="0"/>
+            <a:r>
+              <a:rPr/>
+              <a:t>Develops, implements, monitors, and promotes data policies within their domain, in alignment with corporate data governance.</a:t>
+            </a:r>
+          </a:p>
+          <a:p>
+            <a:pPr lvl="0"/>
+            <a:r>
+              <a:rPr/>
+              <a:t>Creates and encourages the use of common metadata, controlled vocabularies, and data standards for their data area.</a:t>
+            </a:r>
+          </a:p>
+          <a:p>
+            <a:pPr lvl="0"/>
+            <a:r>
+              <a:rPr/>
+              <a:t>Provides guidance, reports progress, and escalates issues to strategic leadership when necessary.</a:t>
+            </a:r>
+          </a:p>
+          <a:p>
+            <a:pPr lvl="0"/>
+            <a:r>
+              <a:rPr/>
+              <a:t>Links business and policy needs to data assets, and identifies data gaps at corporate, interservice, or local levels.</a:t>
+            </a:r>
+          </a:p>
+          <a:p>
+            <a:pPr lvl="0"/>
+            <a:r>
+              <a:rPr/>
+              <a:t>Works with other groups and governance partners to support or implement specific data policies and actions.</a:t>
+            </a:r>
+          </a:p>
+          <a:p>
+            <a:pPr lvl="0"/>
+            <a:r>
+              <a:rPr/>
+              <a:t>Offers support and sharing expertise with data owners, data stewards, and other staff within their domain.</a:t>
+            </a:r>
+          </a:p>
+        </p:txBody>
+      </p:sp>
+    </p:spTree>
+  </p:cSld>
+</p:sld>
+</file>
+
+<file path=ppt/slides/slide9.xml><?xml version="1.0" encoding="utf-8"?>
+<p:sld xmlns:a="http://schemas.openxmlformats.org/drawingml/2006/main" xmlns:r="http://schemas.openxmlformats.org/officeDocument/2006/relationships" xmlns:p="http://schemas.openxmlformats.org/presentationml/2006/main">
+  <p:cSld>
+    <p:spTree>
+      <p:nvGrpSpPr>
+        <p:cNvPr id="1" name=""/>
+        <p:cNvGrpSpPr/>
+        <p:nvPr/>
+      </p:nvGrpSpPr>
+      <p:grpSpPr>
+        <a:xfrm>
+          <a:off x="0" y="0"/>
+          <a:ext cx="0" cy="0"/>
+          <a:chOff x="0" y="0"/>
+          <a:chExt cx="0" cy="0"/>
+        </a:xfrm>
+      </p:grpSpPr>
+      <p:sp>
+        <p:nvSpPr>
+          <p:cNvPr id="2" name="Title 1"/>
+          <p:cNvSpPr>
+            <a:spLocks noGrp="1"/>
+          </p:cNvSpPr>
+          <p:nvPr>
+            <p:ph type="title"/>
+          </p:nvPr>
+        </p:nvSpPr>
+        <p:spPr/>
+        <p:txBody>
+          <a:bodyPr/>
+          <a:lstStyle/>
+          <a:p>
+            <a:pPr lvl="0" indent="0" marL="0">
+              <a:buNone/>
+            </a:pPr>
+            <a:r>
+              <a:rPr/>
+              <a:t>Group roles - Data governance boards</a:t>
+            </a:r>
+          </a:p>
+        </p:txBody>
+      </p:sp>
+      <p:sp>
+        <p:nvSpPr>
+          <p:cNvPr id="3" name="Content Placeholder 2"/>
+          <p:cNvSpPr>
+            <a:spLocks noGrp="1"/>
+          </p:cNvSpPr>
+          <p:nvPr>
+            <p:ph idx="1"/>
+          </p:nvPr>
+        </p:nvSpPr>
+        <p:spPr/>
+        <p:txBody>
+          <a:bodyPr/>
+          <a:lstStyle/>
+          <a:p>
+            <a:pPr lvl="0"/>
+            <a:r>
+              <a:rPr/>
+              <a:t>Supports the effective implementation of corporate data governance and policies.</a:t>
+            </a:r>
+          </a:p>
+          <a:p>
+            <a:pPr lvl="0"/>
+            <a:r>
+              <a:rPr/>
+              <a:t>Ensures local data policies are created and aligned with corporate guidance.</a:t>
+            </a:r>
+          </a:p>
+          <a:p>
+            <a:pPr lvl="0"/>
+            <a:r>
+              <a:rPr/>
+              <a:t>Monitors their department’s maturity in data governance, management, and use.</a:t>
+            </a:r>
+          </a:p>
+          <a:p>
+            <a:pPr lvl="0"/>
+            <a:r>
+              <a:rPr/>
+              <a:t>Promotes data governance, data use (including reporting, analytics, and AI), and data literacy at all organisational levels.</a:t>
+            </a:r>
+          </a:p>
+          <a:p>
+            <a:pPr lvl="0"/>
+            <a:r>
+              <a:rPr/>
+              <a:t>Advises on the human and financial resources needed to develop, implement, and maintain data governance and data policies.</a:t>
+            </a:r>
           </a:p>
         </p:txBody>
       </p:sp>

--- a/data-frameworks/09-global-landscape-human-resources.pptx
+++ b/data-frameworks/09-global-landscape-human-resources.pptx
@@ -3825,6 +3825,10 @@
             </a:r>
             <a:br/>
             <a:br/>
+            <a:r>
+              <a:rPr/>
+              <a:t>Ernest Guevarra</a:t>
+            </a:r>
           </a:p>
         </p:txBody>
       </p:sp>

--- a/data-frameworks/09-global-landscape-human-resources.pptx
+++ b/data-frameworks/09-global-landscape-human-resources.pptx
@@ -1,8 +1,8 @@
 
 <file path=ppt/presentation.xml><?xml version="1.0" encoding="utf-8"?>
-<p:presentation xmlns:a="http://schemas.openxmlformats.org/drawingml/2006/main" xmlns:p="http://schemas.openxmlformats.org/presentationml/2006/main" xmlns:r="http://schemas.openxmlformats.org/officeDocument/2006/relationships" autoCompressPictures="0" saveSubsetFonts="1">
+<p:presentation xmlns:a="http://schemas.openxmlformats.org/drawingml/2006/main" xmlns:p="http://schemas.openxmlformats.org/presentationml/2006/main" xmlns:r="http://schemas.openxmlformats.org/officeDocument/2006/relationships" saveSubsetFonts="1" showSpecialPlsOnTitleSld="0">
   <p:sldMasterIdLst>
-    <p:sldMasterId id="2147483648" r:id="rId1"/>
+    <p:sldMasterId id="2147483660" r:id="rId1"/>
   </p:sldMasterIdLst>
   <p:notesMasterIdLst>
     <p:notesMasterId r:id="rId15"/>
@@ -22,13 +22,13 @@
     <p:sldId id="267" r:id="rId13"/>
     <p:sldId id="268" r:id="rId14"/>
   </p:sldIdLst>
-  <p:sldSz cx="9144000" cy="5143500" type="screen16x9"/>
+  <p:sldSz cx="12192000" cy="6858000"/>
   <p:notesSz cx="6858000" cy="9144000"/>
   <p:defaultTextStyle>
     <a:defPPr>
-      <a:defRPr lang="en-US"/>
+      <a:defRPr lang="en-GB"/>
     </a:defPPr>
-    <a:lvl1pPr algn="l" defTabSz="457200" eaLnBrk="1" hangingPunct="1" latinLnBrk="0" marL="0" rtl="0">
+    <a:lvl1pPr algn="l" defTabSz="914400" eaLnBrk="1" hangingPunct="1" latinLnBrk="0" marL="0" rtl="0">
       <a:defRPr kern="1200" sz="1800">
         <a:solidFill>
           <a:schemeClr val="tx1"/>
@@ -38,7 +38,7 @@
         <a:cs typeface="+mn-cs"/>
       </a:defRPr>
     </a:lvl1pPr>
-    <a:lvl2pPr algn="l" defTabSz="457200" eaLnBrk="1" hangingPunct="1" latinLnBrk="0" marL="457200" rtl="0">
+    <a:lvl2pPr algn="l" defTabSz="914400" eaLnBrk="1" hangingPunct="1" latinLnBrk="0" marL="457200" rtl="0">
       <a:defRPr kern="1200" sz="1800">
         <a:solidFill>
           <a:schemeClr val="tx1"/>
@@ -48,7 +48,7 @@
         <a:cs typeface="+mn-cs"/>
       </a:defRPr>
     </a:lvl2pPr>
-    <a:lvl3pPr algn="l" defTabSz="457200" eaLnBrk="1" hangingPunct="1" latinLnBrk="0" marL="914400" rtl="0">
+    <a:lvl3pPr algn="l" defTabSz="914400" eaLnBrk="1" hangingPunct="1" latinLnBrk="0" marL="914400" rtl="0">
       <a:defRPr kern="1200" sz="1800">
         <a:solidFill>
           <a:schemeClr val="tx1"/>
@@ -58,7 +58,7 @@
         <a:cs typeface="+mn-cs"/>
       </a:defRPr>
     </a:lvl3pPr>
-    <a:lvl4pPr algn="l" defTabSz="457200" eaLnBrk="1" hangingPunct="1" latinLnBrk="0" marL="1371600" rtl="0">
+    <a:lvl4pPr algn="l" defTabSz="914400" eaLnBrk="1" hangingPunct="1" latinLnBrk="0" marL="1371600" rtl="0">
       <a:defRPr kern="1200" sz="1800">
         <a:solidFill>
           <a:schemeClr val="tx1"/>
@@ -68,7 +68,7 @@
         <a:cs typeface="+mn-cs"/>
       </a:defRPr>
     </a:lvl4pPr>
-    <a:lvl5pPr algn="l" defTabSz="457200" eaLnBrk="1" hangingPunct="1" latinLnBrk="0" marL="1828800" rtl="0">
+    <a:lvl5pPr algn="l" defTabSz="914400" eaLnBrk="1" hangingPunct="1" latinLnBrk="0" marL="1828800" rtl="0">
       <a:defRPr kern="1200" sz="1800">
         <a:solidFill>
           <a:schemeClr val="tx1"/>
@@ -78,7 +78,7 @@
         <a:cs typeface="+mn-cs"/>
       </a:defRPr>
     </a:lvl5pPr>
-    <a:lvl6pPr algn="l" defTabSz="457200" eaLnBrk="1" hangingPunct="1" latinLnBrk="0" marL="2286000" rtl="0">
+    <a:lvl6pPr algn="l" defTabSz="914400" eaLnBrk="1" hangingPunct="1" latinLnBrk="0" marL="2286000" rtl="0">
       <a:defRPr kern="1200" sz="1800">
         <a:solidFill>
           <a:schemeClr val="tx1"/>
@@ -88,7 +88,7 @@
         <a:cs typeface="+mn-cs"/>
       </a:defRPr>
     </a:lvl6pPr>
-    <a:lvl7pPr algn="l" defTabSz="457200" eaLnBrk="1" hangingPunct="1" latinLnBrk="0" marL="2743200" rtl="0">
+    <a:lvl7pPr algn="l" defTabSz="914400" eaLnBrk="1" hangingPunct="1" latinLnBrk="0" marL="2743200" rtl="0">
       <a:defRPr kern="1200" sz="1800">
         <a:solidFill>
           <a:schemeClr val="tx1"/>
@@ -98,7 +98,7 @@
         <a:cs typeface="+mn-cs"/>
       </a:defRPr>
     </a:lvl7pPr>
-    <a:lvl8pPr algn="l" defTabSz="457200" eaLnBrk="1" hangingPunct="1" latinLnBrk="0" marL="3200400" rtl="0">
+    <a:lvl8pPr algn="l" defTabSz="914400" eaLnBrk="1" hangingPunct="1" latinLnBrk="0" marL="3200400" rtl="0">
       <a:defRPr kern="1200" sz="1800">
         <a:solidFill>
           <a:schemeClr val="tx1"/>
@@ -108,7 +108,7 @@
         <a:cs typeface="+mn-cs"/>
       </a:defRPr>
     </a:lvl8pPr>
-    <a:lvl9pPr algn="l" defTabSz="457200" eaLnBrk="1" hangingPunct="1" latinLnBrk="0" marL="3657600" rtl="0">
+    <a:lvl9pPr algn="l" defTabSz="914400" eaLnBrk="1" hangingPunct="1" latinLnBrk="0" marL="3657600" rtl="0">
       <a:defRPr kern="1200" sz="1800">
         <a:solidFill>
           <a:schemeClr val="tx1"/>
@@ -121,18 +121,7 @@
   </p:defaultTextStyle>
   <p:extLst>
     <p:ext uri="{EFAFB233-063F-42B5-8137-9DF3F51BA10A}">
-      <p15:sldGuideLst xmlns:p15="http://schemas.microsoft.com/office/powerpoint/2012/main">
-        <p15:guide id="1" orient="horz" pos="1620" userDrawn="1">
-          <p15:clr>
-            <a:srgbClr val="A4A3A4"/>
-          </p15:clr>
-        </p15:guide>
-        <p15:guide id="2" pos="2880" userDrawn="1">
-          <p15:clr>
-            <a:srgbClr val="A4A3A4"/>
-          </p15:clr>
-        </p15:guide>
-      </p15:sldGuideLst>
+      <p15:sldGuideLst xmlns:p15="http://schemas.microsoft.com/office/powerpoint/2012/main"/>
     </p:ext>
   </p:extLst>
 </p:presentation>
@@ -828,18 +817,23 @@
         </p:nvSpPr>
         <p:spPr>
           <a:xfrm>
-            <a:off x="685800" y="1597819"/>
-            <a:ext cx="7772400" cy="1102519"/>
+            <a:off x="1524000" y="1122363"/>
+            <a:ext cx="9144000" cy="2387600"/>
           </a:xfrm>
         </p:spPr>
         <p:txBody>
-          <a:bodyPr/>
-          <a:lstStyle/>
-          <a:p>
-            <a:r>
-              <a:rPr lang="en-US"/>
+          <a:bodyPr anchor="b"/>
+          <a:lstStyle>
+            <a:lvl1pPr algn="ctr">
+              <a:defRPr sz="6000"/>
+            </a:lvl1pPr>
+          </a:lstStyle>
+          <a:p>
+            <a:r>
+              <a:rPr lang="en-GB"/>
               <a:t>Click to edit Master title style</a:t>
             </a:r>
+            <a:endParaRPr lang="en-GB" dirty="0"/>
           </a:p>
         </p:txBody>
       </p:sp>
@@ -855,8 +849,8 @@
         </p:nvSpPr>
         <p:spPr>
           <a:xfrm>
-            <a:off x="1371600" y="2914650"/>
-            <a:ext cx="6400800" cy="1314450"/>
+            <a:off x="1524000" y="3602038"/>
+            <a:ext cx="9144000" cy="1655762"/>
           </a:xfrm>
         </p:spPr>
         <p:txBody>
@@ -864,100 +858,47 @@
           <a:lstStyle>
             <a:lvl1pPr marL="0" indent="0" algn="ctr">
               <a:buNone/>
-              <a:defRPr>
-                <a:solidFill>
-                  <a:schemeClr val="tx1">
-                    <a:tint val="75000"/>
-                  </a:schemeClr>
-                </a:solidFill>
-              </a:defRPr>
+              <a:defRPr sz="2400"/>
             </a:lvl1pPr>
-            <a:lvl2pPr marL="342900" indent="0" algn="ctr">
-              <a:buNone/>
-              <a:defRPr>
-                <a:solidFill>
-                  <a:schemeClr val="tx1">
-                    <a:tint val="75000"/>
-                  </a:schemeClr>
-                </a:solidFill>
-              </a:defRPr>
+            <a:lvl2pPr marL="457200" indent="0" algn="ctr">
+              <a:buNone/>
+              <a:defRPr sz="2000"/>
             </a:lvl2pPr>
-            <a:lvl3pPr marL="685800" indent="0" algn="ctr">
-              <a:buNone/>
-              <a:defRPr>
-                <a:solidFill>
-                  <a:schemeClr val="tx1">
-                    <a:tint val="75000"/>
-                  </a:schemeClr>
-                </a:solidFill>
-              </a:defRPr>
+            <a:lvl3pPr marL="914400" indent="0" algn="ctr">
+              <a:buNone/>
+              <a:defRPr sz="1800"/>
             </a:lvl3pPr>
-            <a:lvl4pPr marL="1028700" indent="0" algn="ctr">
-              <a:buNone/>
-              <a:defRPr>
-                <a:solidFill>
-                  <a:schemeClr val="tx1">
-                    <a:tint val="75000"/>
-                  </a:schemeClr>
-                </a:solidFill>
-              </a:defRPr>
+            <a:lvl4pPr marL="1371600" indent="0" algn="ctr">
+              <a:buNone/>
+              <a:defRPr sz="1600"/>
             </a:lvl4pPr>
-            <a:lvl5pPr marL="1371600" indent="0" algn="ctr">
-              <a:buNone/>
-              <a:defRPr>
-                <a:solidFill>
-                  <a:schemeClr val="tx1">
-                    <a:tint val="75000"/>
-                  </a:schemeClr>
-                </a:solidFill>
-              </a:defRPr>
+            <a:lvl5pPr marL="1828800" indent="0" algn="ctr">
+              <a:buNone/>
+              <a:defRPr sz="1600"/>
             </a:lvl5pPr>
-            <a:lvl6pPr marL="1714500" indent="0" algn="ctr">
-              <a:buNone/>
-              <a:defRPr>
-                <a:solidFill>
-                  <a:schemeClr val="tx1">
-                    <a:tint val="75000"/>
-                  </a:schemeClr>
-                </a:solidFill>
-              </a:defRPr>
+            <a:lvl6pPr marL="2286000" indent="0" algn="ctr">
+              <a:buNone/>
+              <a:defRPr sz="1600"/>
             </a:lvl6pPr>
-            <a:lvl7pPr marL="2057400" indent="0" algn="ctr">
-              <a:buNone/>
-              <a:defRPr>
-                <a:solidFill>
-                  <a:schemeClr val="tx1">
-                    <a:tint val="75000"/>
-                  </a:schemeClr>
-                </a:solidFill>
-              </a:defRPr>
+            <a:lvl7pPr marL="2743200" indent="0" algn="ctr">
+              <a:buNone/>
+              <a:defRPr sz="1600"/>
             </a:lvl7pPr>
-            <a:lvl8pPr marL="2400300" indent="0" algn="ctr">
-              <a:buNone/>
-              <a:defRPr>
-                <a:solidFill>
-                  <a:schemeClr val="tx1">
-                    <a:tint val="75000"/>
-                  </a:schemeClr>
-                </a:solidFill>
-              </a:defRPr>
+            <a:lvl8pPr marL="3200400" indent="0" algn="ctr">
+              <a:buNone/>
+              <a:defRPr sz="1600"/>
             </a:lvl8pPr>
-            <a:lvl9pPr marL="2743200" indent="0" algn="ctr">
-              <a:buNone/>
-              <a:defRPr>
-                <a:solidFill>
-                  <a:schemeClr val="tx1">
-                    <a:tint val="75000"/>
-                  </a:schemeClr>
-                </a:solidFill>
-              </a:defRPr>
+            <a:lvl9pPr marL="3657600" indent="0" algn="ctr">
+              <a:buNone/>
+              <a:defRPr sz="1600"/>
             </a:lvl9pPr>
           </a:lstStyle>
           <a:p>
             <a:r>
-              <a:rPr lang="en-US"/>
+              <a:rPr lang="en-GB"/>
               <a:t>Click to edit Master subtitle style</a:t>
             </a:r>
+            <a:endParaRPr lang="en-GB" dirty="0"/>
           </a:p>
         </p:txBody>
       </p:sp>
@@ -976,11 +917,11 @@
           <a:bodyPr/>
           <a:lstStyle/>
           <a:p>
-            <a:fld id="{241EB5C9-1307-BA42-ABA2-0BC069CD8E7F}" type="datetimeFigureOut">
-              <a:rPr lang="en-US" smtClean="0"/>
-              <a:t>1/2/22</a:t>
+            <a:fld id="{846CE7D5-CF57-46EF-B807-FDD0502418D4}" type="datetimeFigureOut">
+              <a:rPr lang="en-GB" smtClean="0"/>
+              <a:t>13/01/2026</a:t>
             </a:fld>
-            <a:endParaRPr lang="en-US"/>
+            <a:endParaRPr lang="en-GB"/>
           </a:p>
         </p:txBody>
       </p:sp>
@@ -999,7 +940,10 @@
           <a:bodyPr/>
           <a:lstStyle/>
           <a:p>
-            <a:endParaRPr lang="en-US"/>
+            <a:r>
+              <a:rPr lang="en-GB"/>
+              <a:t>Tâm Anh Oxford Partnership</a:t>
+            </a:r>
           </a:p>
         </p:txBody>
       </p:sp>
@@ -1018,24 +962,25 @@
           <a:bodyPr/>
           <a:lstStyle/>
           <a:p>
-            <a:fld id="{C5EF2332-01BF-834F-8236-50238282D533}" type="slidenum">
-              <a:rPr lang="en-US" smtClean="0"/>
+            <a:fld id="{330EA680-D336-4FF7-8B7A-9848BB0A1C32}" type="slidenum">
+              <a:rPr lang="en-GB" smtClean="0"/>
               <a:t>‹#›</a:t>
             </a:fld>
-            <a:endParaRPr lang="en-US"/>
+            <a:endParaRPr lang="en-GB"/>
           </a:p>
         </p:txBody>
       </p:sp>
     </p:spTree>
     <p:extLst>
       <p:ext uri="{BB962C8B-B14F-4D97-AF65-F5344CB8AC3E}">
-        <p14:creationId xmlns:p14="http://schemas.microsoft.com/office/powerpoint/2010/main" val="1444357513"/>
+        <p14:creationId xmlns:p14="http://schemas.microsoft.com/office/powerpoint/2010/main" val="2385387890"/>
       </p:ext>
     </p:extLst>
   </p:cSld>
   <p:clrMapOvr>
     <a:masterClrMapping/>
   </p:clrMapOvr>
+  <p:hf sldNum="0" hdr="0" ftr="0" dt="0"/>
 </p:sldLayout>
 </file>
 
@@ -1072,9 +1017,10 @@
           <a:lstStyle/>
           <a:p>
             <a:r>
-              <a:rPr lang="en-US"/>
+              <a:rPr lang="en-GB"/>
               <a:t>Click to edit Master title style</a:t>
             </a:r>
+            <a:endParaRPr lang="en-GB" dirty="0"/>
           </a:p>
         </p:txBody>
       </p:sp>
@@ -1095,37 +1041,38 @@
           <a:p>
             <a:pPr lvl="0"/>
             <a:r>
-              <a:rPr lang="en-US"/>
+              <a:rPr lang="en-GB"/>
               <a:t>Click to edit Master text styles</a:t>
             </a:r>
           </a:p>
           <a:p>
             <a:pPr lvl="1"/>
             <a:r>
-              <a:rPr lang="en-US"/>
+              <a:rPr lang="en-GB"/>
               <a:t>Second level</a:t>
             </a:r>
           </a:p>
           <a:p>
             <a:pPr lvl="2"/>
             <a:r>
-              <a:rPr lang="en-US"/>
+              <a:rPr lang="en-GB"/>
               <a:t>Third level</a:t>
             </a:r>
           </a:p>
           <a:p>
             <a:pPr lvl="3"/>
             <a:r>
-              <a:rPr lang="en-US"/>
+              <a:rPr lang="en-GB"/>
               <a:t>Fourth level</a:t>
             </a:r>
           </a:p>
           <a:p>
             <a:pPr lvl="4"/>
             <a:r>
-              <a:rPr lang="en-US"/>
+              <a:rPr lang="en-GB"/>
               <a:t>Fifth level</a:t>
             </a:r>
+            <a:endParaRPr lang="en-GB" dirty="0"/>
           </a:p>
         </p:txBody>
       </p:sp>
@@ -1144,11 +1091,11 @@
           <a:bodyPr/>
           <a:lstStyle/>
           <a:p>
-            <a:fld id="{241EB5C9-1307-BA42-ABA2-0BC069CD8E7F}" type="datetimeFigureOut">
-              <a:rPr lang="en-US" smtClean="0"/>
-              <a:t>1/2/22</a:t>
+            <a:fld id="{846CE7D5-CF57-46EF-B807-FDD0502418D4}" type="datetimeFigureOut">
+              <a:rPr lang="en-GB" smtClean="0"/>
+              <a:t>13/01/2026</a:t>
             </a:fld>
-            <a:endParaRPr lang="en-US"/>
+            <a:endParaRPr lang="en-GB"/>
           </a:p>
         </p:txBody>
       </p:sp>
@@ -1167,7 +1114,10 @@
           <a:bodyPr/>
           <a:lstStyle/>
           <a:p>
-            <a:endParaRPr lang="en-US"/>
+            <a:r>
+              <a:rPr lang="en-GB"/>
+              <a:t>Tâm Anh Oxford Partnership</a:t>
+            </a:r>
           </a:p>
         </p:txBody>
       </p:sp>
@@ -1186,24 +1136,25 @@
           <a:bodyPr/>
           <a:lstStyle/>
           <a:p>
-            <a:fld id="{C5EF2332-01BF-834F-8236-50238282D533}" type="slidenum">
-              <a:rPr lang="en-US" smtClean="0"/>
+            <a:fld id="{330EA680-D336-4FF7-8B7A-9848BB0A1C32}" type="slidenum">
+              <a:rPr lang="en-GB" smtClean="0"/>
               <a:t>‹#›</a:t>
             </a:fld>
-            <a:endParaRPr lang="en-US"/>
+            <a:endParaRPr lang="en-GB"/>
           </a:p>
         </p:txBody>
       </p:sp>
     </p:spTree>
     <p:extLst>
       <p:ext uri="{BB962C8B-B14F-4D97-AF65-F5344CB8AC3E}">
-        <p14:creationId xmlns:p14="http://schemas.microsoft.com/office/powerpoint/2010/main" val="313914798"/>
+        <p14:creationId xmlns:p14="http://schemas.microsoft.com/office/powerpoint/2010/main" val="2202905451"/>
       </p:ext>
     </p:extLst>
   </p:cSld>
   <p:clrMapOvr>
     <a:masterClrMapping/>
   </p:clrMapOvr>
+  <p:hf hdr="0" dt="0"/>
 </p:sldLayout>
 </file>
 
@@ -1236,8 +1187,8 @@
         </p:nvSpPr>
         <p:spPr>
           <a:xfrm>
-            <a:off x="6629400" y="205979"/>
-            <a:ext cx="2057400" cy="4388644"/>
+            <a:off x="8724900" y="365125"/>
+            <a:ext cx="2628900" cy="5811838"/>
           </a:xfrm>
         </p:spPr>
         <p:txBody>
@@ -1245,9 +1196,10 @@
           <a:lstStyle/>
           <a:p>
             <a:r>
-              <a:rPr lang="en-US"/>
+              <a:rPr lang="en-GB"/>
               <a:t>Click to edit Master title style</a:t>
             </a:r>
+            <a:endParaRPr lang="en-GB" dirty="0"/>
           </a:p>
         </p:txBody>
       </p:sp>
@@ -1263,8 +1215,8 @@
         </p:nvSpPr>
         <p:spPr>
           <a:xfrm>
-            <a:off x="457200" y="205979"/>
-            <a:ext cx="6019800" cy="4388644"/>
+            <a:off x="838200" y="365125"/>
+            <a:ext cx="7734300" cy="5811838"/>
           </a:xfrm>
         </p:spPr>
         <p:txBody>
@@ -1273,37 +1225,38 @@
           <a:p>
             <a:pPr lvl="0"/>
             <a:r>
-              <a:rPr lang="en-US"/>
+              <a:rPr lang="en-GB"/>
               <a:t>Click to edit Master text styles</a:t>
             </a:r>
           </a:p>
           <a:p>
             <a:pPr lvl="1"/>
             <a:r>
-              <a:rPr lang="en-US"/>
+              <a:rPr lang="en-GB"/>
               <a:t>Second level</a:t>
             </a:r>
           </a:p>
           <a:p>
             <a:pPr lvl="2"/>
             <a:r>
-              <a:rPr lang="en-US"/>
+              <a:rPr lang="en-GB"/>
               <a:t>Third level</a:t>
             </a:r>
           </a:p>
           <a:p>
             <a:pPr lvl="3"/>
             <a:r>
-              <a:rPr lang="en-US"/>
+              <a:rPr lang="en-GB"/>
               <a:t>Fourth level</a:t>
             </a:r>
           </a:p>
           <a:p>
             <a:pPr lvl="4"/>
             <a:r>
-              <a:rPr lang="en-US"/>
+              <a:rPr lang="en-GB"/>
               <a:t>Fifth level</a:t>
             </a:r>
+            <a:endParaRPr lang="en-GB" dirty="0"/>
           </a:p>
         </p:txBody>
       </p:sp>
@@ -1322,11 +1275,11 @@
           <a:bodyPr/>
           <a:lstStyle/>
           <a:p>
-            <a:fld id="{241EB5C9-1307-BA42-ABA2-0BC069CD8E7F}" type="datetimeFigureOut">
-              <a:rPr lang="en-US" smtClean="0"/>
-              <a:t>1/2/22</a:t>
+            <a:fld id="{846CE7D5-CF57-46EF-B807-FDD0502418D4}" type="datetimeFigureOut">
+              <a:rPr lang="en-GB" smtClean="0"/>
+              <a:t>13/01/2026</a:t>
             </a:fld>
-            <a:endParaRPr lang="en-US"/>
+            <a:endParaRPr lang="en-GB"/>
           </a:p>
         </p:txBody>
       </p:sp>
@@ -1345,7 +1298,10 @@
           <a:bodyPr/>
           <a:lstStyle/>
           <a:p>
-            <a:endParaRPr lang="en-US"/>
+            <a:r>
+              <a:rPr lang="en-GB"/>
+              <a:t>Tâm Anh Oxford Partnership</a:t>
+            </a:r>
           </a:p>
         </p:txBody>
       </p:sp>
@@ -1364,24 +1320,25 @@
           <a:bodyPr/>
           <a:lstStyle/>
           <a:p>
-            <a:fld id="{C5EF2332-01BF-834F-8236-50238282D533}" type="slidenum">
-              <a:rPr lang="en-US" smtClean="0"/>
+            <a:fld id="{330EA680-D336-4FF7-8B7A-9848BB0A1C32}" type="slidenum">
+              <a:rPr lang="en-GB" smtClean="0"/>
               <a:t>‹#›</a:t>
             </a:fld>
-            <a:endParaRPr lang="en-US"/>
+            <a:endParaRPr lang="en-GB"/>
           </a:p>
         </p:txBody>
       </p:sp>
     </p:spTree>
     <p:extLst>
       <p:ext uri="{BB962C8B-B14F-4D97-AF65-F5344CB8AC3E}">
-        <p14:creationId xmlns:p14="http://schemas.microsoft.com/office/powerpoint/2010/main" val="2581529045"/>
+        <p14:creationId xmlns:p14="http://schemas.microsoft.com/office/powerpoint/2010/main" val="3479445657"/>
       </p:ext>
     </p:extLst>
   </p:cSld>
   <p:clrMapOvr>
     <a:masterClrMapping/>
   </p:clrMapOvr>
+  <p:hf hdr="0" dt="0"/>
 </p:sldLayout>
 </file>
 
@@ -1418,9 +1375,10 @@
           <a:lstStyle/>
           <a:p>
             <a:r>
-              <a:rPr lang="en-US"/>
+              <a:rPr lang="en-GB"/>
               <a:t>Click to edit Master title style</a:t>
             </a:r>
+            <a:endParaRPr lang="en-GB" dirty="0"/>
           </a:p>
         </p:txBody>
       </p:sp>
@@ -1441,37 +1399,38 @@
           <a:p>
             <a:pPr lvl="0"/>
             <a:r>
-              <a:rPr lang="en-US"/>
+              <a:rPr lang="en-GB"/>
               <a:t>Click to edit Master text styles</a:t>
             </a:r>
           </a:p>
           <a:p>
             <a:pPr lvl="1"/>
             <a:r>
-              <a:rPr lang="en-US"/>
+              <a:rPr lang="en-GB"/>
               <a:t>Second level</a:t>
             </a:r>
           </a:p>
           <a:p>
             <a:pPr lvl="2"/>
             <a:r>
-              <a:rPr lang="en-US"/>
+              <a:rPr lang="en-GB"/>
               <a:t>Third level</a:t>
             </a:r>
           </a:p>
           <a:p>
             <a:pPr lvl="3"/>
             <a:r>
-              <a:rPr lang="en-US"/>
+              <a:rPr lang="en-GB"/>
               <a:t>Fourth level</a:t>
             </a:r>
           </a:p>
           <a:p>
             <a:pPr lvl="4"/>
             <a:r>
-              <a:rPr lang="en-US"/>
+              <a:rPr lang="en-GB"/>
               <a:t>Fifth level</a:t>
             </a:r>
+            <a:endParaRPr lang="en-GB" dirty="0"/>
           </a:p>
         </p:txBody>
       </p:sp>
@@ -1490,11 +1449,11 @@
           <a:bodyPr/>
           <a:lstStyle/>
           <a:p>
-            <a:fld id="{241EB5C9-1307-BA42-ABA2-0BC069CD8E7F}" type="datetimeFigureOut">
-              <a:rPr lang="en-US" smtClean="0"/>
-              <a:t>1/2/22</a:t>
+            <a:fld id="{846CE7D5-CF57-46EF-B807-FDD0502418D4}" type="datetimeFigureOut">
+              <a:rPr lang="en-GB" smtClean="0"/>
+              <a:t>13/01/2026</a:t>
             </a:fld>
-            <a:endParaRPr lang="en-US"/>
+            <a:endParaRPr lang="en-GB"/>
           </a:p>
         </p:txBody>
       </p:sp>
@@ -1513,7 +1472,10 @@
           <a:bodyPr/>
           <a:lstStyle/>
           <a:p>
-            <a:endParaRPr lang="en-US"/>
+            <a:r>
+              <a:rPr lang="en-GB"/>
+              <a:t>Tâm Anh Oxford Partnership</a:t>
+            </a:r>
           </a:p>
         </p:txBody>
       </p:sp>
@@ -1532,24 +1494,25 @@
           <a:bodyPr/>
           <a:lstStyle/>
           <a:p>
-            <a:fld id="{C5EF2332-01BF-834F-8236-50238282D533}" type="slidenum">
-              <a:rPr lang="en-US" smtClean="0"/>
+            <a:fld id="{330EA680-D336-4FF7-8B7A-9848BB0A1C32}" type="slidenum">
+              <a:rPr lang="en-GB" smtClean="0"/>
               <a:t>‹#›</a:t>
             </a:fld>
-            <a:endParaRPr lang="en-US"/>
+            <a:endParaRPr lang="en-GB"/>
           </a:p>
         </p:txBody>
       </p:sp>
     </p:spTree>
     <p:extLst>
       <p:ext uri="{BB962C8B-B14F-4D97-AF65-F5344CB8AC3E}">
-        <p14:creationId xmlns:p14="http://schemas.microsoft.com/office/powerpoint/2010/main" val="338346009"/>
+        <p14:creationId xmlns:p14="http://schemas.microsoft.com/office/powerpoint/2010/main" val="949138452"/>
       </p:ext>
     </p:extLst>
   </p:cSld>
   <p:clrMapOvr>
     <a:masterClrMapping/>
   </p:clrMapOvr>
+  <p:hf hdr="0" dt="0"/>
 </p:sldLayout>
 </file>
 
@@ -1582,22 +1545,23 @@
         </p:nvSpPr>
         <p:spPr>
           <a:xfrm>
-            <a:off x="722313" y="3305176"/>
-            <a:ext cx="7772400" cy="1021556"/>
+            <a:off x="831850" y="1709738"/>
+            <a:ext cx="10515600" cy="2852737"/>
           </a:xfrm>
         </p:spPr>
         <p:txBody>
-          <a:bodyPr anchor="t"/>
+          <a:bodyPr anchor="b"/>
           <a:lstStyle>
-            <a:lvl1pPr algn="l">
-              <a:defRPr sz="3000" b="1" cap="all"/>
+            <a:lvl1pPr>
+              <a:defRPr sz="6000"/>
             </a:lvl1pPr>
           </a:lstStyle>
           <a:p>
             <a:r>
-              <a:rPr lang="en-US"/>
+              <a:rPr lang="en-GB"/>
               <a:t>Click to edit Master title style</a:t>
             </a:r>
+            <a:endParaRPr lang="en-GB" dirty="0"/>
           </a:p>
         </p:txBody>
       </p:sp>
@@ -1613,99 +1577,99 @@
         </p:nvSpPr>
         <p:spPr>
           <a:xfrm>
-            <a:off x="722313" y="2180035"/>
-            <a:ext cx="7772400" cy="1125140"/>
+            <a:off x="831850" y="4589463"/>
+            <a:ext cx="10515600" cy="1500187"/>
           </a:xfrm>
         </p:spPr>
         <p:txBody>
-          <a:bodyPr anchor="b"/>
+          <a:bodyPr/>
           <a:lstStyle>
             <a:lvl1pPr marL="0" indent="0">
               <a:buNone/>
-              <a:defRPr sz="1500">
+              <a:defRPr sz="2400">
                 <a:solidFill>
                   <a:schemeClr val="tx1">
-                    <a:tint val="75000"/>
+                    <a:tint val="82000"/>
                   </a:schemeClr>
                 </a:solidFill>
               </a:defRPr>
             </a:lvl1pPr>
-            <a:lvl2pPr marL="342900" indent="0">
-              <a:buNone/>
-              <a:defRPr sz="1350">
+            <a:lvl2pPr marL="457200" indent="0">
+              <a:buNone/>
+              <a:defRPr sz="2000">
                 <a:solidFill>
                   <a:schemeClr val="tx1">
-                    <a:tint val="75000"/>
+                    <a:tint val="82000"/>
                   </a:schemeClr>
                 </a:solidFill>
               </a:defRPr>
             </a:lvl2pPr>
-            <a:lvl3pPr marL="685800" indent="0">
-              <a:buNone/>
-              <a:defRPr sz="1200">
+            <a:lvl3pPr marL="914400" indent="0">
+              <a:buNone/>
+              <a:defRPr sz="1800">
                 <a:solidFill>
                   <a:schemeClr val="tx1">
-                    <a:tint val="75000"/>
+                    <a:tint val="82000"/>
                   </a:schemeClr>
                 </a:solidFill>
               </a:defRPr>
             </a:lvl3pPr>
-            <a:lvl4pPr marL="1028700" indent="0">
-              <a:buNone/>
-              <a:defRPr sz="1050">
+            <a:lvl4pPr marL="1371600" indent="0">
+              <a:buNone/>
+              <a:defRPr sz="1600">
                 <a:solidFill>
                   <a:schemeClr val="tx1">
-                    <a:tint val="75000"/>
+                    <a:tint val="82000"/>
                   </a:schemeClr>
                 </a:solidFill>
               </a:defRPr>
             </a:lvl4pPr>
-            <a:lvl5pPr marL="1371600" indent="0">
-              <a:buNone/>
-              <a:defRPr sz="1050">
+            <a:lvl5pPr marL="1828800" indent="0">
+              <a:buNone/>
+              <a:defRPr sz="1600">
                 <a:solidFill>
                   <a:schemeClr val="tx1">
-                    <a:tint val="75000"/>
+                    <a:tint val="82000"/>
                   </a:schemeClr>
                 </a:solidFill>
               </a:defRPr>
             </a:lvl5pPr>
-            <a:lvl6pPr marL="1714500" indent="0">
-              <a:buNone/>
-              <a:defRPr sz="1050">
+            <a:lvl6pPr marL="2286000" indent="0">
+              <a:buNone/>
+              <a:defRPr sz="1600">
                 <a:solidFill>
                   <a:schemeClr val="tx1">
-                    <a:tint val="75000"/>
+                    <a:tint val="82000"/>
                   </a:schemeClr>
                 </a:solidFill>
               </a:defRPr>
             </a:lvl6pPr>
-            <a:lvl7pPr marL="2057400" indent="0">
-              <a:buNone/>
-              <a:defRPr sz="1050">
+            <a:lvl7pPr marL="2743200" indent="0">
+              <a:buNone/>
+              <a:defRPr sz="1600">
                 <a:solidFill>
                   <a:schemeClr val="tx1">
-                    <a:tint val="75000"/>
+                    <a:tint val="82000"/>
                   </a:schemeClr>
                 </a:solidFill>
               </a:defRPr>
             </a:lvl7pPr>
-            <a:lvl8pPr marL="2400300" indent="0">
-              <a:buNone/>
-              <a:defRPr sz="1050">
+            <a:lvl8pPr marL="3200400" indent="0">
+              <a:buNone/>
+              <a:defRPr sz="1600">
                 <a:solidFill>
                   <a:schemeClr val="tx1">
-                    <a:tint val="75000"/>
+                    <a:tint val="82000"/>
                   </a:schemeClr>
                 </a:solidFill>
               </a:defRPr>
             </a:lvl8pPr>
-            <a:lvl9pPr marL="2743200" indent="0">
-              <a:buNone/>
-              <a:defRPr sz="1050">
+            <a:lvl9pPr marL="3657600" indent="0">
+              <a:buNone/>
+              <a:defRPr sz="1600">
                 <a:solidFill>
                   <a:schemeClr val="tx1">
-                    <a:tint val="75000"/>
+                    <a:tint val="82000"/>
                   </a:schemeClr>
                 </a:solidFill>
               </a:defRPr>
@@ -1714,7 +1678,7 @@
           <a:p>
             <a:pPr lvl="0"/>
             <a:r>
-              <a:rPr lang="en-US"/>
+              <a:rPr lang="en-GB"/>
               <a:t>Click to edit Master text styles</a:t>
             </a:r>
           </a:p>
@@ -1735,11 +1699,11 @@
           <a:bodyPr/>
           <a:lstStyle/>
           <a:p>
-            <a:fld id="{241EB5C9-1307-BA42-ABA2-0BC069CD8E7F}" type="datetimeFigureOut">
-              <a:rPr lang="en-US" smtClean="0"/>
-              <a:t>1/2/22</a:t>
+            <a:fld id="{846CE7D5-CF57-46EF-B807-FDD0502418D4}" type="datetimeFigureOut">
+              <a:rPr lang="en-GB" smtClean="0"/>
+              <a:t>13/01/2026</a:t>
             </a:fld>
-            <a:endParaRPr lang="en-US"/>
+            <a:endParaRPr lang="en-GB"/>
           </a:p>
         </p:txBody>
       </p:sp>
@@ -1758,7 +1722,10 @@
           <a:bodyPr/>
           <a:lstStyle/>
           <a:p>
-            <a:endParaRPr lang="en-US"/>
+            <a:r>
+              <a:rPr lang="en-GB"/>
+              <a:t>Tâm Anh Oxford Partnership</a:t>
+            </a:r>
           </a:p>
         </p:txBody>
       </p:sp>
@@ -1777,24 +1744,25 @@
           <a:bodyPr/>
           <a:lstStyle/>
           <a:p>
-            <a:fld id="{C5EF2332-01BF-834F-8236-50238282D533}" type="slidenum">
-              <a:rPr lang="en-US" smtClean="0"/>
+            <a:fld id="{330EA680-D336-4FF7-8B7A-9848BB0A1C32}" type="slidenum">
+              <a:rPr lang="en-GB" smtClean="0"/>
               <a:t>‹#›</a:t>
             </a:fld>
-            <a:endParaRPr lang="en-US"/>
+            <a:endParaRPr lang="en-GB"/>
           </a:p>
         </p:txBody>
       </p:sp>
     </p:spTree>
     <p:extLst>
       <p:ext uri="{BB962C8B-B14F-4D97-AF65-F5344CB8AC3E}">
-        <p14:creationId xmlns:p14="http://schemas.microsoft.com/office/powerpoint/2010/main" val="1073069076"/>
+        <p14:creationId xmlns:p14="http://schemas.microsoft.com/office/powerpoint/2010/main" val="2591524520"/>
       </p:ext>
     </p:extLst>
   </p:cSld>
   <p:clrMapOvr>
     <a:masterClrMapping/>
   </p:clrMapOvr>
+  <p:hf hdr="0" dt="0"/>
 </p:sldLayout>
 </file>
 
@@ -1831,9 +1799,10 @@
           <a:lstStyle/>
           <a:p>
             <a:r>
-              <a:rPr lang="en-US"/>
+              <a:rPr lang="en-GB"/>
               <a:t>Click to edit Master title style</a:t>
             </a:r>
+            <a:endParaRPr lang="en-GB" dirty="0"/>
           </a:p>
         </p:txBody>
       </p:sp>
@@ -1849,75 +1818,48 @@
         </p:nvSpPr>
         <p:spPr>
           <a:xfrm>
-            <a:off x="457200" y="1200151"/>
-            <a:ext cx="4038600" cy="3394472"/>
+            <a:off x="838200" y="1825625"/>
+            <a:ext cx="5181600" cy="4351338"/>
           </a:xfrm>
         </p:spPr>
         <p:txBody>
           <a:bodyPr/>
-          <a:lstStyle>
-            <a:lvl1pPr>
-              <a:defRPr sz="2100"/>
-            </a:lvl1pPr>
-            <a:lvl2pPr>
-              <a:defRPr sz="1800"/>
-            </a:lvl2pPr>
-            <a:lvl3pPr>
-              <a:defRPr sz="1500"/>
-            </a:lvl3pPr>
-            <a:lvl4pPr>
-              <a:defRPr sz="1350"/>
-            </a:lvl4pPr>
-            <a:lvl5pPr>
-              <a:defRPr sz="1350"/>
-            </a:lvl5pPr>
-            <a:lvl6pPr>
-              <a:defRPr sz="1350"/>
-            </a:lvl6pPr>
-            <a:lvl7pPr>
-              <a:defRPr sz="1350"/>
-            </a:lvl7pPr>
-            <a:lvl8pPr>
-              <a:defRPr sz="1350"/>
-            </a:lvl8pPr>
-            <a:lvl9pPr>
-              <a:defRPr sz="1350"/>
-            </a:lvl9pPr>
-          </a:lstStyle>
-          <a:p>
-            <a:pPr lvl="0"/>
-            <a:r>
-              <a:rPr lang="en-US"/>
+          <a:lstStyle/>
+          <a:p>
+            <a:pPr lvl="0"/>
+            <a:r>
+              <a:rPr lang="en-GB"/>
               <a:t>Click to edit Master text styles</a:t>
             </a:r>
           </a:p>
           <a:p>
             <a:pPr lvl="1"/>
             <a:r>
-              <a:rPr lang="en-US"/>
+              <a:rPr lang="en-GB"/>
               <a:t>Second level</a:t>
             </a:r>
           </a:p>
           <a:p>
             <a:pPr lvl="2"/>
             <a:r>
-              <a:rPr lang="en-US"/>
+              <a:rPr lang="en-GB"/>
               <a:t>Third level</a:t>
             </a:r>
           </a:p>
           <a:p>
             <a:pPr lvl="3"/>
             <a:r>
-              <a:rPr lang="en-US"/>
+              <a:rPr lang="en-GB"/>
               <a:t>Fourth level</a:t>
             </a:r>
           </a:p>
           <a:p>
             <a:pPr lvl="4"/>
             <a:r>
-              <a:rPr lang="en-US"/>
+              <a:rPr lang="en-GB"/>
               <a:t>Fifth level</a:t>
             </a:r>
+            <a:endParaRPr lang="en-GB" dirty="0"/>
           </a:p>
         </p:txBody>
       </p:sp>
@@ -1933,75 +1875,48 @@
         </p:nvSpPr>
         <p:spPr>
           <a:xfrm>
-            <a:off x="4648200" y="1200151"/>
-            <a:ext cx="4038600" cy="3394472"/>
+            <a:off x="6172200" y="1825625"/>
+            <a:ext cx="5181600" cy="4351338"/>
           </a:xfrm>
         </p:spPr>
         <p:txBody>
           <a:bodyPr/>
-          <a:lstStyle>
-            <a:lvl1pPr>
-              <a:defRPr sz="2100"/>
-            </a:lvl1pPr>
-            <a:lvl2pPr>
-              <a:defRPr sz="1800"/>
-            </a:lvl2pPr>
-            <a:lvl3pPr>
-              <a:defRPr sz="1500"/>
-            </a:lvl3pPr>
-            <a:lvl4pPr>
-              <a:defRPr sz="1350"/>
-            </a:lvl4pPr>
-            <a:lvl5pPr>
-              <a:defRPr sz="1350"/>
-            </a:lvl5pPr>
-            <a:lvl6pPr>
-              <a:defRPr sz="1350"/>
-            </a:lvl6pPr>
-            <a:lvl7pPr>
-              <a:defRPr sz="1350"/>
-            </a:lvl7pPr>
-            <a:lvl8pPr>
-              <a:defRPr sz="1350"/>
-            </a:lvl8pPr>
-            <a:lvl9pPr>
-              <a:defRPr sz="1350"/>
-            </a:lvl9pPr>
-          </a:lstStyle>
-          <a:p>
-            <a:pPr lvl="0"/>
-            <a:r>
-              <a:rPr lang="en-US"/>
+          <a:lstStyle/>
+          <a:p>
+            <a:pPr lvl="0"/>
+            <a:r>
+              <a:rPr lang="en-GB"/>
               <a:t>Click to edit Master text styles</a:t>
             </a:r>
           </a:p>
           <a:p>
             <a:pPr lvl="1"/>
             <a:r>
-              <a:rPr lang="en-US"/>
+              <a:rPr lang="en-GB"/>
               <a:t>Second level</a:t>
             </a:r>
           </a:p>
           <a:p>
             <a:pPr lvl="2"/>
             <a:r>
-              <a:rPr lang="en-US"/>
+              <a:rPr lang="en-GB"/>
               <a:t>Third level</a:t>
             </a:r>
           </a:p>
           <a:p>
             <a:pPr lvl="3"/>
             <a:r>
-              <a:rPr lang="en-US"/>
+              <a:rPr lang="en-GB"/>
               <a:t>Fourth level</a:t>
             </a:r>
           </a:p>
           <a:p>
             <a:pPr lvl="4"/>
             <a:r>
-              <a:rPr lang="en-US"/>
+              <a:rPr lang="en-GB"/>
               <a:t>Fifth level</a:t>
             </a:r>
+            <a:endParaRPr lang="en-GB" dirty="0"/>
           </a:p>
         </p:txBody>
       </p:sp>
@@ -2020,11 +1935,11 @@
           <a:bodyPr/>
           <a:lstStyle/>
           <a:p>
-            <a:fld id="{241EB5C9-1307-BA42-ABA2-0BC069CD8E7F}" type="datetimeFigureOut">
-              <a:rPr lang="en-US" smtClean="0"/>
-              <a:t>1/2/22</a:t>
+            <a:fld id="{846CE7D5-CF57-46EF-B807-FDD0502418D4}" type="datetimeFigureOut">
+              <a:rPr lang="en-GB" smtClean="0"/>
+              <a:t>13/01/2026</a:t>
             </a:fld>
-            <a:endParaRPr lang="en-US"/>
+            <a:endParaRPr lang="en-GB"/>
           </a:p>
         </p:txBody>
       </p:sp>
@@ -2043,7 +1958,10 @@
           <a:bodyPr/>
           <a:lstStyle/>
           <a:p>
-            <a:endParaRPr lang="en-US"/>
+            <a:r>
+              <a:rPr lang="en-GB"/>
+              <a:t>Tâm Anh Oxford Partnership</a:t>
+            </a:r>
           </a:p>
         </p:txBody>
       </p:sp>
@@ -2062,24 +1980,25 @@
           <a:bodyPr/>
           <a:lstStyle/>
           <a:p>
-            <a:fld id="{C5EF2332-01BF-834F-8236-50238282D533}" type="slidenum">
-              <a:rPr lang="en-US" smtClean="0"/>
+            <a:fld id="{330EA680-D336-4FF7-8B7A-9848BB0A1C32}" type="slidenum">
+              <a:rPr lang="en-GB" smtClean="0"/>
               <a:t>‹#›</a:t>
             </a:fld>
-            <a:endParaRPr lang="en-US"/>
+            <a:endParaRPr lang="en-GB"/>
           </a:p>
         </p:txBody>
       </p:sp>
     </p:spTree>
     <p:extLst>
       <p:ext uri="{BB962C8B-B14F-4D97-AF65-F5344CB8AC3E}">
-        <p14:creationId xmlns:p14="http://schemas.microsoft.com/office/powerpoint/2010/main" val="2619886245"/>
+        <p14:creationId xmlns:p14="http://schemas.microsoft.com/office/powerpoint/2010/main" val="1203092039"/>
       </p:ext>
     </p:extLst>
   </p:cSld>
   <p:clrMapOvr>
     <a:masterClrMapping/>
   </p:clrMapOvr>
+  <p:hf hdr="0" dt="0"/>
 </p:sldLayout>
 </file>
 
@@ -2110,36 +2029,38 @@
             <p:ph type="title"/>
           </p:nvPr>
         </p:nvSpPr>
-        <p:spPr/>
-        <p:txBody>
-          <a:bodyPr/>
-          <a:lstStyle>
-            <a:lvl1pPr>
-              <a:defRPr/>
-            </a:lvl1pPr>
-          </a:lstStyle>
-          <a:p>
-            <a:r>
-              <a:rPr lang="en-US"/>
-              <a:t>Click to edit Master title style</a:t>
-            </a:r>
-          </a:p>
-        </p:txBody>
-      </p:sp>
-      <p:sp>
-        <p:nvSpPr>
-          <p:cNvPr id="3" name="Text Placeholder 2"/>
-          <p:cNvSpPr>
-            <a:spLocks noGrp="1"/>
-          </p:cNvSpPr>
-          <p:nvPr>
-            <p:ph type="body" idx="1"/>
-          </p:nvPr>
-        </p:nvSpPr>
         <p:spPr>
           <a:xfrm>
-            <a:off x="457200" y="1151335"/>
-            <a:ext cx="4040188" cy="479822"/>
+            <a:off x="839788" y="365125"/>
+            <a:ext cx="10515600" cy="1325563"/>
+          </a:xfrm>
+        </p:spPr>
+        <p:txBody>
+          <a:bodyPr/>
+          <a:lstStyle/>
+          <a:p>
+            <a:r>
+              <a:rPr lang="en-GB"/>
+              <a:t>Click to edit Master title style</a:t>
+            </a:r>
+            <a:endParaRPr lang="en-GB" dirty="0"/>
+          </a:p>
+        </p:txBody>
+      </p:sp>
+      <p:sp>
+        <p:nvSpPr>
+          <p:cNvPr id="3" name="Text Placeholder 2"/>
+          <p:cNvSpPr>
+            <a:spLocks noGrp="1"/>
+          </p:cNvSpPr>
+          <p:nvPr>
+            <p:ph type="body" idx="1"/>
+          </p:nvPr>
+        </p:nvSpPr>
+        <p:spPr>
+          <a:xfrm>
+            <a:off x="839788" y="1681163"/>
+            <a:ext cx="5157787" cy="823912"/>
           </a:xfrm>
         </p:spPr>
         <p:txBody>
@@ -2147,45 +2068,45 @@
           <a:lstStyle>
             <a:lvl1pPr marL="0" indent="0">
               <a:buNone/>
+              <a:defRPr sz="2400" b="1"/>
+            </a:lvl1pPr>
+            <a:lvl2pPr marL="457200" indent="0">
+              <a:buNone/>
+              <a:defRPr sz="2000" b="1"/>
+            </a:lvl2pPr>
+            <a:lvl3pPr marL="914400" indent="0">
+              <a:buNone/>
               <a:defRPr sz="1800" b="1"/>
-            </a:lvl1pPr>
-            <a:lvl2pPr marL="342900" indent="0">
-              <a:buNone/>
-              <a:defRPr sz="1500" b="1"/>
-            </a:lvl2pPr>
-            <a:lvl3pPr marL="685800" indent="0">
-              <a:buNone/>
-              <a:defRPr sz="1350" b="1"/>
             </a:lvl3pPr>
-            <a:lvl4pPr marL="1028700" indent="0">
-              <a:buNone/>
-              <a:defRPr sz="1200" b="1"/>
+            <a:lvl4pPr marL="1371600" indent="0">
+              <a:buNone/>
+              <a:defRPr sz="1600" b="1"/>
             </a:lvl4pPr>
-            <a:lvl5pPr marL="1371600" indent="0">
-              <a:buNone/>
-              <a:defRPr sz="1200" b="1"/>
+            <a:lvl5pPr marL="1828800" indent="0">
+              <a:buNone/>
+              <a:defRPr sz="1600" b="1"/>
             </a:lvl5pPr>
-            <a:lvl6pPr marL="1714500" indent="0">
-              <a:buNone/>
-              <a:defRPr sz="1200" b="1"/>
+            <a:lvl6pPr marL="2286000" indent="0">
+              <a:buNone/>
+              <a:defRPr sz="1600" b="1"/>
             </a:lvl6pPr>
-            <a:lvl7pPr marL="2057400" indent="0">
-              <a:buNone/>
-              <a:defRPr sz="1200" b="1"/>
+            <a:lvl7pPr marL="2743200" indent="0">
+              <a:buNone/>
+              <a:defRPr sz="1600" b="1"/>
             </a:lvl7pPr>
-            <a:lvl8pPr marL="2400300" indent="0">
-              <a:buNone/>
-              <a:defRPr sz="1200" b="1"/>
+            <a:lvl8pPr marL="3200400" indent="0">
+              <a:buNone/>
+              <a:defRPr sz="1600" b="1"/>
             </a:lvl8pPr>
-            <a:lvl9pPr marL="2743200" indent="0">
-              <a:buNone/>
-              <a:defRPr sz="1200" b="1"/>
+            <a:lvl9pPr marL="3657600" indent="0">
+              <a:buNone/>
+              <a:defRPr sz="1600" b="1"/>
             </a:lvl9pPr>
           </a:lstStyle>
           <a:p>
             <a:pPr lvl="0"/>
             <a:r>
-              <a:rPr lang="en-US"/>
+              <a:rPr lang="en-GB"/>
               <a:t>Click to edit Master text styles</a:t>
             </a:r>
           </a:p>
@@ -2203,75 +2124,48 @@
         </p:nvSpPr>
         <p:spPr>
           <a:xfrm>
-            <a:off x="457200" y="1631156"/>
-            <a:ext cx="4040188" cy="2963466"/>
+            <a:off x="839788" y="2505075"/>
+            <a:ext cx="5157787" cy="3684588"/>
           </a:xfrm>
         </p:spPr>
         <p:txBody>
           <a:bodyPr/>
-          <a:lstStyle>
-            <a:lvl1pPr>
-              <a:defRPr sz="1800"/>
-            </a:lvl1pPr>
-            <a:lvl2pPr>
-              <a:defRPr sz="1500"/>
-            </a:lvl2pPr>
-            <a:lvl3pPr>
-              <a:defRPr sz="1350"/>
-            </a:lvl3pPr>
-            <a:lvl4pPr>
-              <a:defRPr sz="1200"/>
-            </a:lvl4pPr>
-            <a:lvl5pPr>
-              <a:defRPr sz="1200"/>
-            </a:lvl5pPr>
-            <a:lvl6pPr>
-              <a:defRPr sz="1200"/>
-            </a:lvl6pPr>
-            <a:lvl7pPr>
-              <a:defRPr sz="1200"/>
-            </a:lvl7pPr>
-            <a:lvl8pPr>
-              <a:defRPr sz="1200"/>
-            </a:lvl8pPr>
-            <a:lvl9pPr>
-              <a:defRPr sz="1200"/>
-            </a:lvl9pPr>
-          </a:lstStyle>
-          <a:p>
-            <a:pPr lvl="0"/>
-            <a:r>
-              <a:rPr lang="en-US"/>
+          <a:lstStyle/>
+          <a:p>
+            <a:pPr lvl="0"/>
+            <a:r>
+              <a:rPr lang="en-GB"/>
               <a:t>Click to edit Master text styles</a:t>
             </a:r>
           </a:p>
           <a:p>
             <a:pPr lvl="1"/>
             <a:r>
-              <a:rPr lang="en-US"/>
+              <a:rPr lang="en-GB"/>
               <a:t>Second level</a:t>
             </a:r>
           </a:p>
           <a:p>
             <a:pPr lvl="2"/>
             <a:r>
-              <a:rPr lang="en-US"/>
+              <a:rPr lang="en-GB"/>
               <a:t>Third level</a:t>
             </a:r>
           </a:p>
           <a:p>
             <a:pPr lvl="3"/>
             <a:r>
-              <a:rPr lang="en-US"/>
+              <a:rPr lang="en-GB"/>
               <a:t>Fourth level</a:t>
             </a:r>
           </a:p>
           <a:p>
             <a:pPr lvl="4"/>
             <a:r>
-              <a:rPr lang="en-US"/>
+              <a:rPr lang="en-GB"/>
               <a:t>Fifth level</a:t>
             </a:r>
+            <a:endParaRPr lang="en-GB" dirty="0"/>
           </a:p>
         </p:txBody>
       </p:sp>
@@ -2287,8 +2181,8 @@
         </p:nvSpPr>
         <p:spPr>
           <a:xfrm>
-            <a:off x="4645026" y="1151335"/>
-            <a:ext cx="4041775" cy="479822"/>
+            <a:off x="6172200" y="1681163"/>
+            <a:ext cx="5183188" cy="823912"/>
           </a:xfrm>
         </p:spPr>
         <p:txBody>
@@ -2296,45 +2190,45 @@
           <a:lstStyle>
             <a:lvl1pPr marL="0" indent="0">
               <a:buNone/>
+              <a:defRPr sz="2400" b="1"/>
+            </a:lvl1pPr>
+            <a:lvl2pPr marL="457200" indent="0">
+              <a:buNone/>
+              <a:defRPr sz="2000" b="1"/>
+            </a:lvl2pPr>
+            <a:lvl3pPr marL="914400" indent="0">
+              <a:buNone/>
               <a:defRPr sz="1800" b="1"/>
-            </a:lvl1pPr>
-            <a:lvl2pPr marL="342900" indent="0">
-              <a:buNone/>
-              <a:defRPr sz="1500" b="1"/>
-            </a:lvl2pPr>
-            <a:lvl3pPr marL="685800" indent="0">
-              <a:buNone/>
-              <a:defRPr sz="1350" b="1"/>
             </a:lvl3pPr>
-            <a:lvl4pPr marL="1028700" indent="0">
-              <a:buNone/>
-              <a:defRPr sz="1200" b="1"/>
+            <a:lvl4pPr marL="1371600" indent="0">
+              <a:buNone/>
+              <a:defRPr sz="1600" b="1"/>
             </a:lvl4pPr>
-            <a:lvl5pPr marL="1371600" indent="0">
-              <a:buNone/>
-              <a:defRPr sz="1200" b="1"/>
+            <a:lvl5pPr marL="1828800" indent="0">
+              <a:buNone/>
+              <a:defRPr sz="1600" b="1"/>
             </a:lvl5pPr>
-            <a:lvl6pPr marL="1714500" indent="0">
-              <a:buNone/>
-              <a:defRPr sz="1200" b="1"/>
+            <a:lvl6pPr marL="2286000" indent="0">
+              <a:buNone/>
+              <a:defRPr sz="1600" b="1"/>
             </a:lvl6pPr>
-            <a:lvl7pPr marL="2057400" indent="0">
-              <a:buNone/>
-              <a:defRPr sz="1200" b="1"/>
+            <a:lvl7pPr marL="2743200" indent="0">
+              <a:buNone/>
+              <a:defRPr sz="1600" b="1"/>
             </a:lvl7pPr>
-            <a:lvl8pPr marL="2400300" indent="0">
-              <a:buNone/>
-              <a:defRPr sz="1200" b="1"/>
+            <a:lvl8pPr marL="3200400" indent="0">
+              <a:buNone/>
+              <a:defRPr sz="1600" b="1"/>
             </a:lvl8pPr>
-            <a:lvl9pPr marL="2743200" indent="0">
-              <a:buNone/>
-              <a:defRPr sz="1200" b="1"/>
+            <a:lvl9pPr marL="3657600" indent="0">
+              <a:buNone/>
+              <a:defRPr sz="1600" b="1"/>
             </a:lvl9pPr>
           </a:lstStyle>
           <a:p>
             <a:pPr lvl="0"/>
             <a:r>
-              <a:rPr lang="en-US"/>
+              <a:rPr lang="en-GB"/>
               <a:t>Click to edit Master text styles</a:t>
             </a:r>
           </a:p>
@@ -2352,75 +2246,48 @@
         </p:nvSpPr>
         <p:spPr>
           <a:xfrm>
-            <a:off x="4645026" y="1631156"/>
-            <a:ext cx="4041775" cy="2963466"/>
+            <a:off x="6172200" y="2505075"/>
+            <a:ext cx="5183188" cy="3684588"/>
           </a:xfrm>
         </p:spPr>
         <p:txBody>
           <a:bodyPr/>
-          <a:lstStyle>
-            <a:lvl1pPr>
-              <a:defRPr sz="1800"/>
-            </a:lvl1pPr>
-            <a:lvl2pPr>
-              <a:defRPr sz="1500"/>
-            </a:lvl2pPr>
-            <a:lvl3pPr>
-              <a:defRPr sz="1350"/>
-            </a:lvl3pPr>
-            <a:lvl4pPr>
-              <a:defRPr sz="1200"/>
-            </a:lvl4pPr>
-            <a:lvl5pPr>
-              <a:defRPr sz="1200"/>
-            </a:lvl5pPr>
-            <a:lvl6pPr>
-              <a:defRPr sz="1200"/>
-            </a:lvl6pPr>
-            <a:lvl7pPr>
-              <a:defRPr sz="1200"/>
-            </a:lvl7pPr>
-            <a:lvl8pPr>
-              <a:defRPr sz="1200"/>
-            </a:lvl8pPr>
-            <a:lvl9pPr>
-              <a:defRPr sz="1200"/>
-            </a:lvl9pPr>
-          </a:lstStyle>
-          <a:p>
-            <a:pPr lvl="0"/>
-            <a:r>
-              <a:rPr lang="en-US"/>
+          <a:lstStyle/>
+          <a:p>
+            <a:pPr lvl="0"/>
+            <a:r>
+              <a:rPr lang="en-GB"/>
               <a:t>Click to edit Master text styles</a:t>
             </a:r>
           </a:p>
           <a:p>
             <a:pPr lvl="1"/>
             <a:r>
-              <a:rPr lang="en-US"/>
+              <a:rPr lang="en-GB"/>
               <a:t>Second level</a:t>
             </a:r>
           </a:p>
           <a:p>
             <a:pPr lvl="2"/>
             <a:r>
-              <a:rPr lang="en-US"/>
+              <a:rPr lang="en-GB"/>
               <a:t>Third level</a:t>
             </a:r>
           </a:p>
           <a:p>
             <a:pPr lvl="3"/>
             <a:r>
-              <a:rPr lang="en-US"/>
+              <a:rPr lang="en-GB"/>
               <a:t>Fourth level</a:t>
             </a:r>
           </a:p>
           <a:p>
             <a:pPr lvl="4"/>
             <a:r>
-              <a:rPr lang="en-US"/>
+              <a:rPr lang="en-GB"/>
               <a:t>Fifth level</a:t>
             </a:r>
+            <a:endParaRPr lang="en-GB" dirty="0"/>
           </a:p>
         </p:txBody>
       </p:sp>
@@ -2439,11 +2306,11 @@
           <a:bodyPr/>
           <a:lstStyle/>
           <a:p>
-            <a:fld id="{241EB5C9-1307-BA42-ABA2-0BC069CD8E7F}" type="datetimeFigureOut">
-              <a:rPr lang="en-US" smtClean="0"/>
-              <a:t>1/2/22</a:t>
+            <a:fld id="{846CE7D5-CF57-46EF-B807-FDD0502418D4}" type="datetimeFigureOut">
+              <a:rPr lang="en-GB" smtClean="0"/>
+              <a:t>13/01/2026</a:t>
             </a:fld>
-            <a:endParaRPr lang="en-US"/>
+            <a:endParaRPr lang="en-GB"/>
           </a:p>
         </p:txBody>
       </p:sp>
@@ -2462,7 +2329,10 @@
           <a:bodyPr/>
           <a:lstStyle/>
           <a:p>
-            <a:endParaRPr lang="en-US"/>
+            <a:r>
+              <a:rPr lang="en-GB"/>
+              <a:t>Tâm Anh Oxford Partnership</a:t>
+            </a:r>
           </a:p>
         </p:txBody>
       </p:sp>
@@ -2481,24 +2351,25 @@
           <a:bodyPr/>
           <a:lstStyle/>
           <a:p>
-            <a:fld id="{C5EF2332-01BF-834F-8236-50238282D533}" type="slidenum">
-              <a:rPr lang="en-US" smtClean="0"/>
+            <a:fld id="{330EA680-D336-4FF7-8B7A-9848BB0A1C32}" type="slidenum">
+              <a:rPr lang="en-GB" smtClean="0"/>
               <a:t>‹#›</a:t>
             </a:fld>
-            <a:endParaRPr lang="en-US"/>
+            <a:endParaRPr lang="en-GB"/>
           </a:p>
         </p:txBody>
       </p:sp>
     </p:spTree>
     <p:extLst>
       <p:ext uri="{BB962C8B-B14F-4D97-AF65-F5344CB8AC3E}">
-        <p14:creationId xmlns:p14="http://schemas.microsoft.com/office/powerpoint/2010/main" val="2535793967"/>
+        <p14:creationId xmlns:p14="http://schemas.microsoft.com/office/powerpoint/2010/main" val="3733172339"/>
       </p:ext>
     </p:extLst>
   </p:cSld>
   <p:clrMapOvr>
     <a:masterClrMapping/>
   </p:clrMapOvr>
+  <p:hf hdr="0" dt="0"/>
 </p:sldLayout>
 </file>
 
@@ -2535,9 +2406,10 @@
           <a:lstStyle/>
           <a:p>
             <a:r>
-              <a:rPr lang="en-US"/>
+              <a:rPr lang="en-GB"/>
               <a:t>Click to edit Master title style</a:t>
             </a:r>
+            <a:endParaRPr lang="en-GB" dirty="0"/>
           </a:p>
         </p:txBody>
       </p:sp>
@@ -2556,11 +2428,11 @@
           <a:bodyPr/>
           <a:lstStyle/>
           <a:p>
-            <a:fld id="{241EB5C9-1307-BA42-ABA2-0BC069CD8E7F}" type="datetimeFigureOut">
-              <a:rPr lang="en-US" smtClean="0"/>
-              <a:t>1/2/22</a:t>
+            <a:fld id="{846CE7D5-CF57-46EF-B807-FDD0502418D4}" type="datetimeFigureOut">
+              <a:rPr lang="en-GB" smtClean="0"/>
+              <a:t>13/01/2026</a:t>
             </a:fld>
-            <a:endParaRPr lang="en-US"/>
+            <a:endParaRPr lang="en-GB"/>
           </a:p>
         </p:txBody>
       </p:sp>
@@ -2579,7 +2451,10 @@
           <a:bodyPr/>
           <a:lstStyle/>
           <a:p>
-            <a:endParaRPr lang="en-US"/>
+            <a:r>
+              <a:rPr lang="en-GB"/>
+              <a:t>Tâm Anh Oxford Partnership</a:t>
+            </a:r>
           </a:p>
         </p:txBody>
       </p:sp>
@@ -2598,24 +2473,25 @@
           <a:bodyPr/>
           <a:lstStyle/>
           <a:p>
-            <a:fld id="{C5EF2332-01BF-834F-8236-50238282D533}" type="slidenum">
-              <a:rPr lang="en-US" smtClean="0"/>
+            <a:fld id="{330EA680-D336-4FF7-8B7A-9848BB0A1C32}" type="slidenum">
+              <a:rPr lang="en-GB" smtClean="0"/>
               <a:t>‹#›</a:t>
             </a:fld>
-            <a:endParaRPr lang="en-US"/>
+            <a:endParaRPr lang="en-GB"/>
           </a:p>
         </p:txBody>
       </p:sp>
     </p:spTree>
     <p:extLst>
       <p:ext uri="{BB962C8B-B14F-4D97-AF65-F5344CB8AC3E}">
-        <p14:creationId xmlns:p14="http://schemas.microsoft.com/office/powerpoint/2010/main" val="3472721253"/>
+        <p14:creationId xmlns:p14="http://schemas.microsoft.com/office/powerpoint/2010/main" val="3210312558"/>
       </p:ext>
     </p:extLst>
   </p:cSld>
   <p:clrMapOvr>
     <a:masterClrMapping/>
   </p:clrMapOvr>
+  <p:hf hdr="0" dt="0"/>
 </p:sldLayout>
 </file>
 
@@ -2651,11 +2527,11 @@
           <a:bodyPr/>
           <a:lstStyle/>
           <a:p>
-            <a:fld id="{241EB5C9-1307-BA42-ABA2-0BC069CD8E7F}" type="datetimeFigureOut">
-              <a:rPr lang="en-US" smtClean="0"/>
-              <a:t>1/2/22</a:t>
+            <a:fld id="{846CE7D5-CF57-46EF-B807-FDD0502418D4}" type="datetimeFigureOut">
+              <a:rPr lang="en-GB" smtClean="0"/>
+              <a:t>13/01/2026</a:t>
             </a:fld>
-            <a:endParaRPr lang="en-US"/>
+            <a:endParaRPr lang="en-GB"/>
           </a:p>
         </p:txBody>
       </p:sp>
@@ -2674,7 +2550,10 @@
           <a:bodyPr/>
           <a:lstStyle/>
           <a:p>
-            <a:endParaRPr lang="en-US"/>
+            <a:r>
+              <a:rPr lang="en-GB"/>
+              <a:t>Tâm Anh Oxford Partnership</a:t>
+            </a:r>
           </a:p>
         </p:txBody>
       </p:sp>
@@ -2693,24 +2572,25 @@
           <a:bodyPr/>
           <a:lstStyle/>
           <a:p>
-            <a:fld id="{C5EF2332-01BF-834F-8236-50238282D533}" type="slidenum">
-              <a:rPr lang="en-US" smtClean="0"/>
+            <a:fld id="{330EA680-D336-4FF7-8B7A-9848BB0A1C32}" type="slidenum">
+              <a:rPr lang="en-GB" smtClean="0"/>
               <a:t>‹#›</a:t>
             </a:fld>
-            <a:endParaRPr lang="en-US"/>
+            <a:endParaRPr lang="en-GB"/>
           </a:p>
         </p:txBody>
       </p:sp>
     </p:spTree>
     <p:extLst>
       <p:ext uri="{BB962C8B-B14F-4D97-AF65-F5344CB8AC3E}">
-        <p14:creationId xmlns:p14="http://schemas.microsoft.com/office/powerpoint/2010/main" val="2130901097"/>
+        <p14:creationId xmlns:p14="http://schemas.microsoft.com/office/powerpoint/2010/main" val="3146388984"/>
       </p:ext>
     </p:extLst>
   </p:cSld>
   <p:clrMapOvr>
     <a:masterClrMapping/>
   </p:clrMapOvr>
+  <p:hf hdr="0" dt="0"/>
 </p:sldLayout>
 </file>
 
@@ -2743,22 +2623,23 @@
         </p:nvSpPr>
         <p:spPr>
           <a:xfrm>
-            <a:off x="457201" y="204787"/>
-            <a:ext cx="3008313" cy="871538"/>
+            <a:off x="839788" y="457200"/>
+            <a:ext cx="3932237" cy="1600200"/>
           </a:xfrm>
         </p:spPr>
         <p:txBody>
           <a:bodyPr anchor="b"/>
           <a:lstStyle>
-            <a:lvl1pPr algn="l">
-              <a:defRPr sz="1500" b="1"/>
+            <a:lvl1pPr>
+              <a:defRPr sz="3200"/>
             </a:lvl1pPr>
           </a:lstStyle>
           <a:p>
             <a:r>
-              <a:rPr lang="en-US"/>
+              <a:rPr lang="en-GB"/>
               <a:t>Click to edit Master title style</a:t>
             </a:r>
+            <a:endParaRPr lang="en-GB" dirty="0"/>
           </a:p>
         </p:txBody>
       </p:sp>
@@ -2774,75 +2655,76 @@
         </p:nvSpPr>
         <p:spPr>
           <a:xfrm>
-            <a:off x="3575050" y="204788"/>
-            <a:ext cx="5111750" cy="4389835"/>
+            <a:off x="5183188" y="987425"/>
+            <a:ext cx="6172200" cy="4873625"/>
           </a:xfrm>
         </p:spPr>
         <p:txBody>
           <a:bodyPr/>
           <a:lstStyle>
             <a:lvl1pPr>
-              <a:defRPr sz="2400"/>
+              <a:defRPr sz="3200"/>
             </a:lvl1pPr>
             <a:lvl2pPr>
-              <a:defRPr sz="2100"/>
+              <a:defRPr sz="2800"/>
             </a:lvl2pPr>
             <a:lvl3pPr>
-              <a:defRPr sz="1800"/>
+              <a:defRPr sz="2400"/>
             </a:lvl3pPr>
             <a:lvl4pPr>
-              <a:defRPr sz="1500"/>
+              <a:defRPr sz="2000"/>
             </a:lvl4pPr>
             <a:lvl5pPr>
-              <a:defRPr sz="1500"/>
+              <a:defRPr sz="2000"/>
             </a:lvl5pPr>
             <a:lvl6pPr>
-              <a:defRPr sz="1500"/>
+              <a:defRPr sz="2000"/>
             </a:lvl6pPr>
             <a:lvl7pPr>
-              <a:defRPr sz="1500"/>
+              <a:defRPr sz="2000"/>
             </a:lvl7pPr>
             <a:lvl8pPr>
-              <a:defRPr sz="1500"/>
+              <a:defRPr sz="2000"/>
             </a:lvl8pPr>
             <a:lvl9pPr>
-              <a:defRPr sz="1500"/>
+              <a:defRPr sz="2000"/>
             </a:lvl9pPr>
           </a:lstStyle>
           <a:p>
             <a:pPr lvl="0"/>
             <a:r>
-              <a:rPr lang="en-US"/>
+              <a:rPr lang="en-GB"/>
               <a:t>Click to edit Master text styles</a:t>
             </a:r>
           </a:p>
           <a:p>
             <a:pPr lvl="1"/>
             <a:r>
-              <a:rPr lang="en-US"/>
+              <a:rPr lang="en-GB"/>
               <a:t>Second level</a:t>
             </a:r>
           </a:p>
           <a:p>
             <a:pPr lvl="2"/>
             <a:r>
-              <a:rPr lang="en-US"/>
+              <a:rPr lang="en-GB"/>
               <a:t>Third level</a:t>
             </a:r>
           </a:p>
           <a:p>
             <a:pPr lvl="3"/>
             <a:r>
-              <a:rPr lang="en-US"/>
+              <a:rPr lang="en-GB"/>
               <a:t>Fourth level</a:t>
             </a:r>
           </a:p>
           <a:p>
             <a:pPr lvl="4"/>
             <a:r>
-              <a:rPr lang="en-US"/>
+              <a:rPr lang="en-GB"/>
               <a:t>Fifth level</a:t>
             </a:r>
+            <a:endParaRPr lang="en-GB" dirty="0"/>
           </a:p>
         </p:txBody>
       </p:sp>
@@ -2858,8 +2740,8 @@
         </p:nvSpPr>
         <p:spPr>
           <a:xfrm>
-            <a:off x="457201" y="1076326"/>
-            <a:ext cx="3008313" cy="3518297"/>
+            <a:off x="839788" y="2057400"/>
+            <a:ext cx="3932237" cy="3811588"/>
           </a:xfrm>
         </p:spPr>
         <p:txBody>
@@ -2867,45 +2749,45 @@
           <a:lstStyle>
             <a:lvl1pPr marL="0" indent="0">
               <a:buNone/>
-              <a:defRPr sz="1050"/>
+              <a:defRPr sz="1600"/>
             </a:lvl1pPr>
-            <a:lvl2pPr marL="342900" indent="0">
-              <a:buNone/>
-              <a:defRPr sz="900"/>
+            <a:lvl2pPr marL="457200" indent="0">
+              <a:buNone/>
+              <a:defRPr sz="1400"/>
             </a:lvl2pPr>
-            <a:lvl3pPr marL="685800" indent="0">
-              <a:buNone/>
-              <a:defRPr sz="750"/>
+            <a:lvl3pPr marL="914400" indent="0">
+              <a:buNone/>
+              <a:defRPr sz="1200"/>
             </a:lvl3pPr>
-            <a:lvl4pPr marL="1028700" indent="0">
-              <a:buNone/>
-              <a:defRPr sz="675"/>
+            <a:lvl4pPr marL="1371600" indent="0">
+              <a:buNone/>
+              <a:defRPr sz="1000"/>
             </a:lvl4pPr>
-            <a:lvl5pPr marL="1371600" indent="0">
-              <a:buNone/>
-              <a:defRPr sz="675"/>
+            <a:lvl5pPr marL="1828800" indent="0">
+              <a:buNone/>
+              <a:defRPr sz="1000"/>
             </a:lvl5pPr>
-            <a:lvl6pPr marL="1714500" indent="0">
-              <a:buNone/>
-              <a:defRPr sz="675"/>
+            <a:lvl6pPr marL="2286000" indent="0">
+              <a:buNone/>
+              <a:defRPr sz="1000"/>
             </a:lvl6pPr>
-            <a:lvl7pPr marL="2057400" indent="0">
-              <a:buNone/>
-              <a:defRPr sz="675"/>
+            <a:lvl7pPr marL="2743200" indent="0">
+              <a:buNone/>
+              <a:defRPr sz="1000"/>
             </a:lvl7pPr>
-            <a:lvl8pPr marL="2400300" indent="0">
-              <a:buNone/>
-              <a:defRPr sz="675"/>
+            <a:lvl8pPr marL="3200400" indent="0">
+              <a:buNone/>
+              <a:defRPr sz="1000"/>
             </a:lvl8pPr>
-            <a:lvl9pPr marL="2743200" indent="0">
-              <a:buNone/>
-              <a:defRPr sz="675"/>
+            <a:lvl9pPr marL="3657600" indent="0">
+              <a:buNone/>
+              <a:defRPr sz="1000"/>
             </a:lvl9pPr>
           </a:lstStyle>
           <a:p>
             <a:pPr lvl="0"/>
             <a:r>
-              <a:rPr lang="en-US"/>
+              <a:rPr lang="en-GB"/>
               <a:t>Click to edit Master text styles</a:t>
             </a:r>
           </a:p>
@@ -2926,11 +2808,11 @@
           <a:bodyPr/>
           <a:lstStyle/>
           <a:p>
-            <a:fld id="{241EB5C9-1307-BA42-ABA2-0BC069CD8E7F}" type="datetimeFigureOut">
-              <a:rPr lang="en-US" smtClean="0"/>
-              <a:t>1/2/22</a:t>
+            <a:fld id="{846CE7D5-CF57-46EF-B807-FDD0502418D4}" type="datetimeFigureOut">
+              <a:rPr lang="en-GB" smtClean="0"/>
+              <a:t>13/01/2026</a:t>
             </a:fld>
-            <a:endParaRPr lang="en-US"/>
+            <a:endParaRPr lang="en-GB"/>
           </a:p>
         </p:txBody>
       </p:sp>
@@ -2949,7 +2831,10 @@
           <a:bodyPr/>
           <a:lstStyle/>
           <a:p>
-            <a:endParaRPr lang="en-US"/>
+            <a:r>
+              <a:rPr lang="en-GB"/>
+              <a:t>Tâm Anh Oxford Partnership</a:t>
+            </a:r>
           </a:p>
         </p:txBody>
       </p:sp>
@@ -2968,24 +2853,25 @@
           <a:bodyPr/>
           <a:lstStyle/>
           <a:p>
-            <a:fld id="{C5EF2332-01BF-834F-8236-50238282D533}" type="slidenum">
-              <a:rPr lang="en-US" smtClean="0"/>
+            <a:fld id="{330EA680-D336-4FF7-8B7A-9848BB0A1C32}" type="slidenum">
+              <a:rPr lang="en-GB" smtClean="0"/>
               <a:t>‹#›</a:t>
             </a:fld>
-            <a:endParaRPr lang="en-US"/>
+            <a:endParaRPr lang="en-GB"/>
           </a:p>
         </p:txBody>
       </p:sp>
     </p:spTree>
     <p:extLst>
       <p:ext uri="{BB962C8B-B14F-4D97-AF65-F5344CB8AC3E}">
-        <p14:creationId xmlns:p14="http://schemas.microsoft.com/office/powerpoint/2010/main" val="3540895647"/>
+        <p14:creationId xmlns:p14="http://schemas.microsoft.com/office/powerpoint/2010/main" val="3171841454"/>
       </p:ext>
     </p:extLst>
   </p:cSld>
   <p:clrMapOvr>
     <a:masterClrMapping/>
   </p:clrMapOvr>
+  <p:hf hdr="0" dt="0"/>
 </p:sldLayout>
 </file>
 
@@ -3018,22 +2904,23 @@
         </p:nvSpPr>
         <p:spPr>
           <a:xfrm>
-            <a:off x="1792288" y="3600450"/>
-            <a:ext cx="5486400" cy="425054"/>
+            <a:off x="839788" y="457200"/>
+            <a:ext cx="3932237" cy="1600200"/>
           </a:xfrm>
         </p:spPr>
         <p:txBody>
           <a:bodyPr anchor="b"/>
           <a:lstStyle>
-            <a:lvl1pPr algn="l">
-              <a:defRPr sz="1500" b="1"/>
+            <a:lvl1pPr>
+              <a:defRPr sz="3200"/>
             </a:lvl1pPr>
           </a:lstStyle>
           <a:p>
             <a:r>
-              <a:rPr lang="en-US"/>
+              <a:rPr lang="en-GB"/>
               <a:t>Click to edit Master title style</a:t>
             </a:r>
+            <a:endParaRPr lang="en-GB" dirty="0"/>
           </a:p>
         </p:txBody>
       </p:sp>
@@ -3041,7 +2928,7 @@
         <p:nvSpPr>
           <p:cNvPr id="3" name="Picture Placeholder 2"/>
           <p:cNvSpPr>
-            <a:spLocks noGrp="1"/>
+            <a:spLocks noGrp="1" noChangeAspect="1"/>
           </p:cNvSpPr>
           <p:nvPr>
             <p:ph type="pic" idx="1"/>
@@ -3049,52 +2936,56 @@
         </p:nvSpPr>
         <p:spPr>
           <a:xfrm>
-            <a:off x="1792288" y="459581"/>
-            <a:ext cx="5486400" cy="3086100"/>
+            <a:off x="5183188" y="987425"/>
+            <a:ext cx="6172200" cy="4873625"/>
           </a:xfrm>
         </p:spPr>
         <p:txBody>
-          <a:bodyPr/>
+          <a:bodyPr anchor="t"/>
           <a:lstStyle>
             <a:lvl1pPr marL="0" indent="0">
               <a:buNone/>
+              <a:defRPr sz="3200"/>
+            </a:lvl1pPr>
+            <a:lvl2pPr marL="457200" indent="0">
+              <a:buNone/>
+              <a:defRPr sz="2800"/>
+            </a:lvl2pPr>
+            <a:lvl3pPr marL="914400" indent="0">
+              <a:buNone/>
               <a:defRPr sz="2400"/>
-            </a:lvl1pPr>
-            <a:lvl2pPr marL="342900" indent="0">
-              <a:buNone/>
-              <a:defRPr sz="2100"/>
-            </a:lvl2pPr>
-            <a:lvl3pPr marL="685800" indent="0">
-              <a:buNone/>
-              <a:defRPr sz="1800"/>
             </a:lvl3pPr>
-            <a:lvl4pPr marL="1028700" indent="0">
-              <a:buNone/>
-              <a:defRPr sz="1500"/>
+            <a:lvl4pPr marL="1371600" indent="0">
+              <a:buNone/>
+              <a:defRPr sz="2000"/>
             </a:lvl4pPr>
-            <a:lvl5pPr marL="1371600" indent="0">
-              <a:buNone/>
-              <a:defRPr sz="1500"/>
+            <a:lvl5pPr marL="1828800" indent="0">
+              <a:buNone/>
+              <a:defRPr sz="2000"/>
             </a:lvl5pPr>
-            <a:lvl6pPr marL="1714500" indent="0">
-              <a:buNone/>
-              <a:defRPr sz="1500"/>
+            <a:lvl6pPr marL="2286000" indent="0">
+              <a:buNone/>
+              <a:defRPr sz="2000"/>
             </a:lvl6pPr>
-            <a:lvl7pPr marL="2057400" indent="0">
-              <a:buNone/>
-              <a:defRPr sz="1500"/>
+            <a:lvl7pPr marL="2743200" indent="0">
+              <a:buNone/>
+              <a:defRPr sz="2000"/>
             </a:lvl7pPr>
-            <a:lvl8pPr marL="2400300" indent="0">
-              <a:buNone/>
-              <a:defRPr sz="1500"/>
+            <a:lvl8pPr marL="3200400" indent="0">
+              <a:buNone/>
+              <a:defRPr sz="2000"/>
             </a:lvl8pPr>
-            <a:lvl9pPr marL="2743200" indent="0">
-              <a:buNone/>
-              <a:defRPr sz="1500"/>
+            <a:lvl9pPr marL="3657600" indent="0">
+              <a:buNone/>
+              <a:defRPr sz="2000"/>
             </a:lvl9pPr>
           </a:lstStyle>
           <a:p>
-            <a:endParaRPr lang="en-US"/>
+            <a:r>
+              <a:rPr lang="en-GB"/>
+              <a:t>Click icon to add picture</a:t>
+            </a:r>
+            <a:endParaRPr lang="en-GB" dirty="0"/>
           </a:p>
         </p:txBody>
       </p:sp>
@@ -3110,8 +3001,8 @@
         </p:nvSpPr>
         <p:spPr>
           <a:xfrm>
-            <a:off x="1792288" y="4025503"/>
-            <a:ext cx="5486400" cy="603647"/>
+            <a:off x="839788" y="2057400"/>
+            <a:ext cx="3932237" cy="3811588"/>
           </a:xfrm>
         </p:spPr>
         <p:txBody>
@@ -3119,45 +3010,45 @@
           <a:lstStyle>
             <a:lvl1pPr marL="0" indent="0">
               <a:buNone/>
-              <a:defRPr sz="1050"/>
+              <a:defRPr sz="1600"/>
             </a:lvl1pPr>
-            <a:lvl2pPr marL="342900" indent="0">
-              <a:buNone/>
-              <a:defRPr sz="900"/>
+            <a:lvl2pPr marL="457200" indent="0">
+              <a:buNone/>
+              <a:defRPr sz="1400"/>
             </a:lvl2pPr>
-            <a:lvl3pPr marL="685800" indent="0">
-              <a:buNone/>
-              <a:defRPr sz="750"/>
+            <a:lvl3pPr marL="914400" indent="0">
+              <a:buNone/>
+              <a:defRPr sz="1200"/>
             </a:lvl3pPr>
-            <a:lvl4pPr marL="1028700" indent="0">
-              <a:buNone/>
-              <a:defRPr sz="675"/>
+            <a:lvl4pPr marL="1371600" indent="0">
+              <a:buNone/>
+              <a:defRPr sz="1000"/>
             </a:lvl4pPr>
-            <a:lvl5pPr marL="1371600" indent="0">
-              <a:buNone/>
-              <a:defRPr sz="675"/>
+            <a:lvl5pPr marL="1828800" indent="0">
+              <a:buNone/>
+              <a:defRPr sz="1000"/>
             </a:lvl5pPr>
-            <a:lvl6pPr marL="1714500" indent="0">
-              <a:buNone/>
-              <a:defRPr sz="675"/>
+            <a:lvl6pPr marL="2286000" indent="0">
+              <a:buNone/>
+              <a:defRPr sz="1000"/>
             </a:lvl6pPr>
-            <a:lvl7pPr marL="2057400" indent="0">
-              <a:buNone/>
-              <a:defRPr sz="675"/>
+            <a:lvl7pPr marL="2743200" indent="0">
+              <a:buNone/>
+              <a:defRPr sz="1000"/>
             </a:lvl7pPr>
-            <a:lvl8pPr marL="2400300" indent="0">
-              <a:buNone/>
-              <a:defRPr sz="675"/>
+            <a:lvl8pPr marL="3200400" indent="0">
+              <a:buNone/>
+              <a:defRPr sz="1000"/>
             </a:lvl8pPr>
-            <a:lvl9pPr marL="2743200" indent="0">
-              <a:buNone/>
-              <a:defRPr sz="675"/>
+            <a:lvl9pPr marL="3657600" indent="0">
+              <a:buNone/>
+              <a:defRPr sz="1000"/>
             </a:lvl9pPr>
           </a:lstStyle>
           <a:p>
             <a:pPr lvl="0"/>
             <a:r>
-              <a:rPr lang="en-US"/>
+              <a:rPr lang="en-GB"/>
               <a:t>Click to edit Master text styles</a:t>
             </a:r>
           </a:p>
@@ -3178,11 +3069,11 @@
           <a:bodyPr/>
           <a:lstStyle/>
           <a:p>
-            <a:fld id="{241EB5C9-1307-BA42-ABA2-0BC069CD8E7F}" type="datetimeFigureOut">
-              <a:rPr lang="en-US" smtClean="0"/>
-              <a:t>1/2/22</a:t>
+            <a:fld id="{846CE7D5-CF57-46EF-B807-FDD0502418D4}" type="datetimeFigureOut">
+              <a:rPr lang="en-GB" smtClean="0"/>
+              <a:t>13/01/2026</a:t>
             </a:fld>
-            <a:endParaRPr lang="en-US"/>
+            <a:endParaRPr lang="en-GB"/>
           </a:p>
         </p:txBody>
       </p:sp>
@@ -3201,7 +3092,10 @@
           <a:bodyPr/>
           <a:lstStyle/>
           <a:p>
-            <a:endParaRPr lang="en-US"/>
+            <a:r>
+              <a:rPr lang="en-GB"/>
+              <a:t>Tâm Anh Oxford Partnership</a:t>
+            </a:r>
           </a:p>
         </p:txBody>
       </p:sp>
@@ -3220,24 +3114,25 @@
           <a:bodyPr/>
           <a:lstStyle/>
           <a:p>
-            <a:fld id="{C5EF2332-01BF-834F-8236-50238282D533}" type="slidenum">
-              <a:rPr lang="en-US" smtClean="0"/>
+            <a:fld id="{330EA680-D336-4FF7-8B7A-9848BB0A1C32}" type="slidenum">
+              <a:rPr lang="en-GB" smtClean="0"/>
               <a:t>‹#›</a:t>
             </a:fld>
-            <a:endParaRPr lang="en-US"/>
+            <a:endParaRPr lang="en-GB"/>
           </a:p>
         </p:txBody>
       </p:sp>
     </p:spTree>
     <p:extLst>
       <p:ext uri="{BB962C8B-B14F-4D97-AF65-F5344CB8AC3E}">
-        <p14:creationId xmlns:p14="http://schemas.microsoft.com/office/powerpoint/2010/main" val="3566899855"/>
+        <p14:creationId xmlns:p14="http://schemas.microsoft.com/office/powerpoint/2010/main" val="1718958274"/>
       </p:ext>
     </p:extLst>
   </p:cSld>
   <p:clrMapOvr>
     <a:masterClrMapping/>
   </p:clrMapOvr>
+  <p:hf hdr="0" dt="0"/>
 </p:sldLayout>
 </file>
 
@@ -3275,8 +3170,8 @@
         </p:nvSpPr>
         <p:spPr>
           <a:xfrm>
-            <a:off x="457200" y="205979"/>
-            <a:ext cx="8229600" cy="857250"/>
+            <a:off x="838200" y="365125"/>
+            <a:ext cx="10515600" cy="1325563"/>
           </a:xfrm>
           <a:prstGeom prst="rect">
             <a:avLst/>
@@ -3289,9 +3184,10 @@
           <a:lstStyle/>
           <a:p>
             <a:r>
-              <a:rPr lang="en-US"/>
+              <a:rPr lang="en-GB"/>
               <a:t>Click to edit Master title style</a:t>
             </a:r>
+            <a:endParaRPr dirty="0" lang="en-GB"/>
           </a:p>
         </p:txBody>
       </p:sp>
@@ -3307,8 +3203,8 @@
         </p:nvSpPr>
         <p:spPr>
           <a:xfrm>
-            <a:off x="457200" y="1200151"/>
-            <a:ext cx="8229600" cy="3394472"/>
+            <a:off x="838200" y="1825625"/>
+            <a:ext cx="10515600" cy="4351338"/>
           </a:xfrm>
           <a:prstGeom prst="rect">
             <a:avLst/>
@@ -3322,37 +3218,38 @@
           <a:p>
             <a:pPr lvl="0"/>
             <a:r>
-              <a:rPr lang="en-US"/>
+              <a:rPr lang="en-GB"/>
               <a:t>Click to edit Master text styles</a:t>
             </a:r>
           </a:p>
           <a:p>
             <a:pPr lvl="1"/>
             <a:r>
-              <a:rPr lang="en-US"/>
+              <a:rPr lang="en-GB"/>
               <a:t>Second level</a:t>
             </a:r>
           </a:p>
           <a:p>
             <a:pPr lvl="2"/>
             <a:r>
-              <a:rPr lang="en-US"/>
+              <a:rPr lang="en-GB"/>
               <a:t>Third level</a:t>
             </a:r>
           </a:p>
           <a:p>
             <a:pPr lvl="3"/>
             <a:r>
-              <a:rPr lang="en-US"/>
+              <a:rPr lang="en-GB"/>
               <a:t>Fourth level</a:t>
             </a:r>
           </a:p>
           <a:p>
             <a:pPr lvl="4"/>
             <a:r>
-              <a:rPr lang="en-US"/>
+              <a:rPr lang="en-GB"/>
               <a:t>Fifth level</a:t>
             </a:r>
+            <a:endParaRPr dirty="0" lang="en-GB"/>
           </a:p>
         </p:txBody>
       </p:sp>
@@ -3368,8 +3265,8 @@
         </p:nvSpPr>
         <p:spPr>
           <a:xfrm>
-            <a:off x="457200" y="4767263"/>
-            <a:ext cx="2133600" cy="273844"/>
+            <a:off x="838200" y="6356350"/>
+            <a:ext cx="2743200" cy="365125"/>
           </a:xfrm>
           <a:prstGeom prst="rect">
             <a:avLst/>
@@ -3379,21 +3276,21 @@
           <a:bodyPr anchor="ctr" bIns="45720" lIns="91440" rIns="91440" rtlCol="0" tIns="45720" vert="horz"/>
           <a:lstStyle>
             <a:lvl1pPr algn="l">
-              <a:defRPr sz="900">
+              <a:defRPr sz="1200">
                 <a:solidFill>
                   <a:schemeClr val="tx1">
-                    <a:tint val="75000"/>
+                    <a:tint val="82000"/>
                   </a:schemeClr>
                 </a:solidFill>
               </a:defRPr>
             </a:lvl1pPr>
           </a:lstStyle>
           <a:p>
-            <a:fld id="{241EB5C9-1307-BA42-ABA2-0BC069CD8E7F}" type="datetimeFigureOut">
-              <a:rPr lang="en-US" smtClean="0"/>
-              <a:t>1/2/22</a:t>
+            <a:fld id="{846CE7D5-CF57-46EF-B807-FDD0502418D4}" type="datetimeFigureOut">
+              <a:rPr lang="en-GB" smtClean="0"/>
+              <a:t>13/01/2026</a:t>
             </a:fld>
-            <a:endParaRPr lang="en-US"/>
+            <a:endParaRPr lang="en-GB"/>
           </a:p>
         </p:txBody>
       </p:sp>
@@ -3409,8 +3306,8 @@
         </p:nvSpPr>
         <p:spPr>
           <a:xfrm>
-            <a:off x="3124200" y="4767263"/>
-            <a:ext cx="2895600" cy="273844"/>
+            <a:off x="4038600" y="6356350"/>
+            <a:ext cx="4114800" cy="365125"/>
           </a:xfrm>
           <a:prstGeom prst="rect">
             <a:avLst/>
@@ -3420,17 +3317,20 @@
           <a:bodyPr anchor="ctr" bIns="45720" lIns="91440" rIns="91440" rtlCol="0" tIns="45720" vert="horz"/>
           <a:lstStyle>
             <a:lvl1pPr algn="ctr">
-              <a:defRPr sz="900">
+              <a:defRPr sz="1200">
                 <a:solidFill>
                   <a:schemeClr val="tx1">
-                    <a:tint val="75000"/>
+                    <a:tint val="82000"/>
                   </a:schemeClr>
                 </a:solidFill>
               </a:defRPr>
             </a:lvl1pPr>
           </a:lstStyle>
           <a:p>
-            <a:endParaRPr lang="en-US"/>
+            <a:r>
+              <a:rPr lang="en-GB"/>
+              <a:t>Tâm Anh Oxford Partnership</a:t>
+            </a:r>
           </a:p>
         </p:txBody>
       </p:sp>
@@ -3446,8 +3346,8 @@
         </p:nvSpPr>
         <p:spPr>
           <a:xfrm>
-            <a:off x="6553200" y="4767263"/>
-            <a:ext cx="2133600" cy="273844"/>
+            <a:off x="8610600" y="6356350"/>
+            <a:ext cx="2743200" cy="365125"/>
           </a:xfrm>
           <a:prstGeom prst="rect">
             <a:avLst/>
@@ -3457,53 +3357,57 @@
           <a:bodyPr anchor="ctr" bIns="45720" lIns="91440" rIns="91440" rtlCol="0" tIns="45720" vert="horz"/>
           <a:lstStyle>
             <a:lvl1pPr algn="r">
-              <a:defRPr sz="900">
+              <a:defRPr sz="1200">
                 <a:solidFill>
                   <a:schemeClr val="tx1">
-                    <a:tint val="75000"/>
+                    <a:tint val="82000"/>
                   </a:schemeClr>
                 </a:solidFill>
               </a:defRPr>
             </a:lvl1pPr>
           </a:lstStyle>
           <a:p>
-            <a:fld id="{C5EF2332-01BF-834F-8236-50238282D533}" type="slidenum">
-              <a:rPr lang="en-US" smtClean="0"/>
+            <a:fld id="{330EA680-D336-4FF7-8B7A-9848BB0A1C32}" type="slidenum">
+              <a:rPr lang="en-GB" smtClean="0"/>
               <a:t>‹#›</a:t>
             </a:fld>
-            <a:endParaRPr lang="en-US"/>
+            <a:endParaRPr lang="en-GB"/>
           </a:p>
         </p:txBody>
       </p:sp>
     </p:spTree>
     <p:extLst>
       <p:ext uri="{BB962C8B-B14F-4D97-AF65-F5344CB8AC3E}">
-        <p14:creationId xmlns:p14="http://schemas.microsoft.com/office/powerpoint/2010/main" val="3676200875"/>
+        <p14:creationId xmlns:p14="http://schemas.microsoft.com/office/powerpoint/2010/main" val="2460954070"/>
       </p:ext>
     </p:extLst>
   </p:cSld>
   <p:clrMap accent1="accent1" accent2="accent2" accent3="accent3" accent4="accent4" accent5="accent5" accent6="accent6" bg1="lt1" bg2="lt2" folHlink="folHlink" hlink="hlink" tx1="dk1" tx2="dk2"/>
   <p:sldLayoutIdLst>
-    <p:sldLayoutId id="2147483649" r:id="rId1"/>
-    <p:sldLayoutId id="2147483650" r:id="rId2"/>
-    <p:sldLayoutId id="2147483651" r:id="rId3"/>
-    <p:sldLayoutId id="2147483652" r:id="rId4"/>
-    <p:sldLayoutId id="2147483653" r:id="rId5"/>
-    <p:sldLayoutId id="2147483654" r:id="rId6"/>
-    <p:sldLayoutId id="2147483655" r:id="rId7"/>
-    <p:sldLayoutId id="2147483656" r:id="rId8"/>
-    <p:sldLayoutId id="2147483657" r:id="rId9"/>
-    <p:sldLayoutId id="2147483658" r:id="rId10"/>
-    <p:sldLayoutId id="2147483659" r:id="rId11"/>
+    <p:sldLayoutId id="2147483661" r:id="rId1"/>
+    <p:sldLayoutId id="2147483662" r:id="rId2"/>
+    <p:sldLayoutId id="2147483663" r:id="rId3"/>
+    <p:sldLayoutId id="2147483664" r:id="rId4"/>
+    <p:sldLayoutId id="2147483665" r:id="rId5"/>
+    <p:sldLayoutId id="2147483666" r:id="rId6"/>
+    <p:sldLayoutId id="2147483667" r:id="rId7"/>
+    <p:sldLayoutId id="2147483668" r:id="rId8"/>
+    <p:sldLayoutId id="2147483669" r:id="rId9"/>
+    <p:sldLayoutId id="2147483670" r:id="rId10"/>
+    <p:sldLayoutId id="2147483671" r:id="rId11"/>
   </p:sldLayoutIdLst>
+  <p:hf dt="0" hdr="0"/>
   <p:txStyles>
     <p:titleStyle>
-      <a:lvl1pPr algn="ctr" defTabSz="342900" eaLnBrk="1" hangingPunct="1" latinLnBrk="0" rtl="0">
+      <a:lvl1pPr algn="l" defTabSz="914400" eaLnBrk="1" hangingPunct="1" latinLnBrk="0" rtl="0">
+        <a:lnSpc>
+          <a:spcPct val="90000"/>
+        </a:lnSpc>
         <a:spcBef>
           <a:spcPct val="0"/>
         </a:spcBef>
         <a:buNone/>
-        <a:defRPr kern="1200" sz="3300">
+        <a:defRPr kern="1200" sz="4400">
           <a:solidFill>
             <a:schemeClr val="tx1"/>
           </a:solidFill>
@@ -3514,11 +3418,32 @@
       </a:lvl1pPr>
     </p:titleStyle>
     <p:bodyStyle>
-      <a:lvl1pPr algn="l" defTabSz="342900" eaLnBrk="1" hangingPunct="1" indent="-342900" latinLnBrk="0" marL="342900" rtl="0">
+      <a:lvl1pPr algn="l" defTabSz="914400" eaLnBrk="1" hangingPunct="1" indent="-228600" latinLnBrk="0" marL="228600" rtl="0">
+        <a:lnSpc>
+          <a:spcPct val="90000"/>
+        </a:lnSpc>
         <a:spcBef>
-          <a:spcPct val="20000"/>
+          <a:spcPts val="1000"/>
         </a:spcBef>
-        <a:buFont typeface="Arial"/>
+        <a:buFont charset="0" panose="020B0604020202020204" pitchFamily="34" typeface="Arial"/>
+        <a:buChar char="•"/>
+        <a:defRPr kern="1200" sz="2800">
+          <a:solidFill>
+            <a:schemeClr val="tx1"/>
+          </a:solidFill>
+          <a:latin typeface="+mn-lt"/>
+          <a:ea typeface="+mn-ea"/>
+          <a:cs typeface="+mn-cs"/>
+        </a:defRPr>
+      </a:lvl1pPr>
+      <a:lvl2pPr algn="l" defTabSz="914400" eaLnBrk="1" hangingPunct="1" indent="-228600" latinLnBrk="0" marL="685800" rtl="0">
+        <a:lnSpc>
+          <a:spcPct val="90000"/>
+        </a:lnSpc>
+        <a:spcBef>
+          <a:spcPts val="500"/>
+        </a:spcBef>
+        <a:buFont charset="0" panose="020B0604020202020204" pitchFamily="34" typeface="Arial"/>
         <a:buChar char="•"/>
         <a:defRPr kern="1200" sz="2400">
           <a:solidFill>
@@ -3528,14 +3453,17 @@
           <a:ea typeface="+mn-ea"/>
           <a:cs typeface="+mn-cs"/>
         </a:defRPr>
-      </a:lvl1pPr>
-      <a:lvl2pPr algn="l" defTabSz="342900" eaLnBrk="1" hangingPunct="1" indent="-342900" latinLnBrk="0" marL="685800" rtl="0">
+      </a:lvl2pPr>
+      <a:lvl3pPr algn="l" defTabSz="914400" eaLnBrk="1" hangingPunct="1" indent="-228600" latinLnBrk="0" marL="1143000" rtl="0">
+        <a:lnSpc>
+          <a:spcPct val="90000"/>
+        </a:lnSpc>
         <a:spcBef>
-          <a:spcPct val="20000"/>
+          <a:spcPts val="500"/>
         </a:spcBef>
-        <a:buFont typeface="Arial"/>
-        <a:buChar char="–"/>
-        <a:defRPr kern="1200" sz="2100">
+        <a:buFont charset="0" panose="020B0604020202020204" pitchFamily="34" typeface="Arial"/>
+        <a:buChar char="•"/>
+        <a:defRPr kern="1200" sz="2000">
           <a:solidFill>
             <a:schemeClr val="tx1"/>
           </a:solidFill>
@@ -3543,12 +3471,15 @@
           <a:ea typeface="+mn-ea"/>
           <a:cs typeface="+mn-cs"/>
         </a:defRPr>
-      </a:lvl2pPr>
-      <a:lvl3pPr algn="l" defTabSz="342900" eaLnBrk="1" hangingPunct="1" indent="-342900" latinLnBrk="0" marL="1028700" rtl="0">
+      </a:lvl3pPr>
+      <a:lvl4pPr algn="l" defTabSz="914400" eaLnBrk="1" hangingPunct="1" indent="-228600" latinLnBrk="0" marL="1600200" rtl="0">
+        <a:lnSpc>
+          <a:spcPct val="90000"/>
+        </a:lnSpc>
         <a:spcBef>
-          <a:spcPct val="20000"/>
+          <a:spcPts val="500"/>
         </a:spcBef>
-        <a:buFont typeface="Arial"/>
+        <a:buFont charset="0" panose="020B0604020202020204" pitchFamily="34" typeface="Arial"/>
         <a:buChar char="•"/>
         <a:defRPr kern="1200" sz="1800">
           <a:solidFill>
@@ -3558,29 +3489,17 @@
           <a:ea typeface="+mn-ea"/>
           <a:cs typeface="+mn-cs"/>
         </a:defRPr>
-      </a:lvl3pPr>
-      <a:lvl4pPr algn="l" defTabSz="342900" eaLnBrk="1" hangingPunct="1" indent="-342900" latinLnBrk="0" marL="1371600" rtl="0">
+      </a:lvl4pPr>
+      <a:lvl5pPr algn="l" defTabSz="914400" eaLnBrk="1" hangingPunct="1" indent="-228600" latinLnBrk="0" marL="2057400" rtl="0">
+        <a:lnSpc>
+          <a:spcPct val="90000"/>
+        </a:lnSpc>
         <a:spcBef>
-          <a:spcPct val="20000"/>
+          <a:spcPts val="500"/>
         </a:spcBef>
-        <a:buFont typeface="Arial"/>
-        <a:buChar char="–"/>
-        <a:defRPr kern="1200" sz="1500">
-          <a:solidFill>
-            <a:schemeClr val="tx1"/>
-          </a:solidFill>
-          <a:latin typeface="+mn-lt"/>
-          <a:ea typeface="+mn-ea"/>
-          <a:cs typeface="+mn-cs"/>
-        </a:defRPr>
-      </a:lvl4pPr>
-      <a:lvl5pPr algn="l" defTabSz="342900" eaLnBrk="1" hangingPunct="1" indent="-342900" latinLnBrk="0" marL="1714500" rtl="0">
-        <a:spcBef>
-          <a:spcPct val="20000"/>
-        </a:spcBef>
-        <a:buFont typeface="Arial"/>
-        <a:buChar char="»"/>
-        <a:defRPr kern="1200" sz="1500">
+        <a:buFont charset="0" panose="020B0604020202020204" pitchFamily="34" typeface="Arial"/>
+        <a:buChar char="•"/>
+        <a:defRPr kern="1200" sz="1800">
           <a:solidFill>
             <a:schemeClr val="tx1"/>
           </a:solidFill>
@@ -3589,13 +3508,16 @@
           <a:cs typeface="+mn-cs"/>
         </a:defRPr>
       </a:lvl5pPr>
-      <a:lvl6pPr algn="l" defTabSz="342900" eaLnBrk="1" hangingPunct="1" indent="-342900" latinLnBrk="0" marL="2057400" rtl="0">
+      <a:lvl6pPr algn="l" defTabSz="914400" eaLnBrk="1" hangingPunct="1" indent="-228600" latinLnBrk="0" marL="2514600" rtl="0">
+        <a:lnSpc>
+          <a:spcPct val="90000"/>
+        </a:lnSpc>
         <a:spcBef>
-          <a:spcPct val="20000"/>
+          <a:spcPts val="500"/>
         </a:spcBef>
-        <a:buFont typeface="Arial"/>
+        <a:buFont charset="0" panose="020B0604020202020204" pitchFamily="34" typeface="Arial"/>
         <a:buChar char="•"/>
-        <a:defRPr kern="1200" sz="1500">
+        <a:defRPr kern="1200" sz="1800">
           <a:solidFill>
             <a:schemeClr val="tx1"/>
           </a:solidFill>
@@ -3604,13 +3526,16 @@
           <a:cs typeface="+mn-cs"/>
         </a:defRPr>
       </a:lvl6pPr>
-      <a:lvl7pPr algn="l" defTabSz="342900" eaLnBrk="1" hangingPunct="1" indent="-342900" latinLnBrk="0" marL="2400300" rtl="0">
+      <a:lvl7pPr algn="l" defTabSz="914400" eaLnBrk="1" hangingPunct="1" indent="-228600" latinLnBrk="0" marL="2971800" rtl="0">
+        <a:lnSpc>
+          <a:spcPct val="90000"/>
+        </a:lnSpc>
         <a:spcBef>
-          <a:spcPct val="20000"/>
+          <a:spcPts val="500"/>
         </a:spcBef>
-        <a:buFont typeface="Arial"/>
+        <a:buFont charset="0" panose="020B0604020202020204" pitchFamily="34" typeface="Arial"/>
         <a:buChar char="•"/>
-        <a:defRPr kern="1200" sz="1500">
+        <a:defRPr kern="1200" sz="1800">
           <a:solidFill>
             <a:schemeClr val="tx1"/>
           </a:solidFill>
@@ -3619,13 +3544,16 @@
           <a:cs typeface="+mn-cs"/>
         </a:defRPr>
       </a:lvl7pPr>
-      <a:lvl8pPr algn="l" defTabSz="342900" eaLnBrk="1" hangingPunct="1" indent="-342900" latinLnBrk="0" marL="2743200" rtl="0">
+      <a:lvl8pPr algn="l" defTabSz="914400" eaLnBrk="1" hangingPunct="1" indent="-228600" latinLnBrk="0" marL="3429000" rtl="0">
+        <a:lnSpc>
+          <a:spcPct val="90000"/>
+        </a:lnSpc>
         <a:spcBef>
-          <a:spcPct val="20000"/>
+          <a:spcPts val="500"/>
         </a:spcBef>
-        <a:buFont typeface="Arial"/>
+        <a:buFont charset="0" panose="020B0604020202020204" pitchFamily="34" typeface="Arial"/>
         <a:buChar char="•"/>
-        <a:defRPr kern="1200" sz="1500">
+        <a:defRPr kern="1200" sz="1800">
           <a:solidFill>
             <a:schemeClr val="tx1"/>
           </a:solidFill>
@@ -3634,13 +3562,16 @@
           <a:cs typeface="+mn-cs"/>
         </a:defRPr>
       </a:lvl8pPr>
-      <a:lvl9pPr algn="l" defTabSz="342900" eaLnBrk="1" hangingPunct="1" indent="-342900" latinLnBrk="0" marL="3086100" rtl="0">
+      <a:lvl9pPr algn="l" defTabSz="914400" eaLnBrk="1" hangingPunct="1" indent="-228600" latinLnBrk="0" marL="3886200" rtl="0">
+        <a:lnSpc>
+          <a:spcPct val="90000"/>
+        </a:lnSpc>
         <a:spcBef>
-          <a:spcPct val="20000"/>
+          <a:spcPts val="500"/>
         </a:spcBef>
-        <a:buFont typeface="Arial"/>
+        <a:buFont charset="0" panose="020B0604020202020204" pitchFamily="34" typeface="Arial"/>
         <a:buChar char="•"/>
-        <a:defRPr kern="1200" sz="1500">
+        <a:defRPr kern="1200" sz="1800">
           <a:solidFill>
             <a:schemeClr val="tx1"/>
           </a:solidFill>
@@ -3652,10 +3583,10 @@
     </p:bodyStyle>
     <p:otherStyle>
       <a:defPPr>
-        <a:defRPr lang="en-US"/>
+        <a:defRPr lang="en-GB"/>
       </a:defPPr>
-      <a:lvl1pPr algn="l" defTabSz="342900" eaLnBrk="1" hangingPunct="1" latinLnBrk="0" marL="0" rtl="0">
-        <a:defRPr kern="1200" sz="1350">
+      <a:lvl1pPr algn="l" defTabSz="914400" eaLnBrk="1" hangingPunct="1" latinLnBrk="0" marL="0" rtl="0">
+        <a:defRPr kern="1200" sz="1800">
           <a:solidFill>
             <a:schemeClr val="tx1"/>
           </a:solidFill>
@@ -3664,8 +3595,8 @@
           <a:cs typeface="+mn-cs"/>
         </a:defRPr>
       </a:lvl1pPr>
-      <a:lvl2pPr algn="l" defTabSz="342900" eaLnBrk="1" hangingPunct="1" latinLnBrk="0" marL="342900" rtl="0">
-        <a:defRPr kern="1200" sz="1350">
+      <a:lvl2pPr algn="l" defTabSz="914400" eaLnBrk="1" hangingPunct="1" latinLnBrk="0" marL="457200" rtl="0">
+        <a:defRPr kern="1200" sz="1800">
           <a:solidFill>
             <a:schemeClr val="tx1"/>
           </a:solidFill>
@@ -3674,8 +3605,8 @@
           <a:cs typeface="+mn-cs"/>
         </a:defRPr>
       </a:lvl2pPr>
-      <a:lvl3pPr algn="l" defTabSz="342900" eaLnBrk="1" hangingPunct="1" latinLnBrk="0" marL="685800" rtl="0">
-        <a:defRPr kern="1200" sz="1350">
+      <a:lvl3pPr algn="l" defTabSz="914400" eaLnBrk="1" hangingPunct="1" latinLnBrk="0" marL="914400" rtl="0">
+        <a:defRPr kern="1200" sz="1800">
           <a:solidFill>
             <a:schemeClr val="tx1"/>
           </a:solidFill>
@@ -3684,8 +3615,8 @@
           <a:cs typeface="+mn-cs"/>
         </a:defRPr>
       </a:lvl3pPr>
-      <a:lvl4pPr algn="l" defTabSz="342900" eaLnBrk="1" hangingPunct="1" latinLnBrk="0" marL="1028700" rtl="0">
-        <a:defRPr kern="1200" sz="1350">
+      <a:lvl4pPr algn="l" defTabSz="914400" eaLnBrk="1" hangingPunct="1" latinLnBrk="0" marL="1371600" rtl="0">
+        <a:defRPr kern="1200" sz="1800">
           <a:solidFill>
             <a:schemeClr val="tx1"/>
           </a:solidFill>
@@ -3694,8 +3625,8 @@
           <a:cs typeface="+mn-cs"/>
         </a:defRPr>
       </a:lvl4pPr>
-      <a:lvl5pPr algn="l" defTabSz="342900" eaLnBrk="1" hangingPunct="1" latinLnBrk="0" marL="1371600" rtl="0">
-        <a:defRPr kern="1200" sz="1350">
+      <a:lvl5pPr algn="l" defTabSz="914400" eaLnBrk="1" hangingPunct="1" latinLnBrk="0" marL="1828800" rtl="0">
+        <a:defRPr kern="1200" sz="1800">
           <a:solidFill>
             <a:schemeClr val="tx1"/>
           </a:solidFill>
@@ -3704,8 +3635,8 @@
           <a:cs typeface="+mn-cs"/>
         </a:defRPr>
       </a:lvl5pPr>
-      <a:lvl6pPr algn="l" defTabSz="342900" eaLnBrk="1" hangingPunct="1" latinLnBrk="0" marL="1714500" rtl="0">
-        <a:defRPr kern="1200" sz="1350">
+      <a:lvl6pPr algn="l" defTabSz="914400" eaLnBrk="1" hangingPunct="1" latinLnBrk="0" marL="2286000" rtl="0">
+        <a:defRPr kern="1200" sz="1800">
           <a:solidFill>
             <a:schemeClr val="tx1"/>
           </a:solidFill>
@@ -3714,8 +3645,8 @@
           <a:cs typeface="+mn-cs"/>
         </a:defRPr>
       </a:lvl6pPr>
-      <a:lvl7pPr algn="l" defTabSz="342900" eaLnBrk="1" hangingPunct="1" latinLnBrk="0" marL="2057400" rtl="0">
-        <a:defRPr kern="1200" sz="1350">
+      <a:lvl7pPr algn="l" defTabSz="914400" eaLnBrk="1" hangingPunct="1" latinLnBrk="0" marL="2743200" rtl="0">
+        <a:defRPr kern="1200" sz="1800">
           <a:solidFill>
             <a:schemeClr val="tx1"/>
           </a:solidFill>
@@ -3724,8 +3655,8 @@
           <a:cs typeface="+mn-cs"/>
         </a:defRPr>
       </a:lvl7pPr>
-      <a:lvl8pPr algn="l" defTabSz="342900" eaLnBrk="1" hangingPunct="1" latinLnBrk="0" marL="2400300" rtl="0">
-        <a:defRPr kern="1200" sz="1350">
+      <a:lvl8pPr algn="l" defTabSz="914400" eaLnBrk="1" hangingPunct="1" latinLnBrk="0" marL="3200400" rtl="0">
+        <a:defRPr kern="1200" sz="1800">
           <a:solidFill>
             <a:schemeClr val="tx1"/>
           </a:solidFill>
@@ -3734,8 +3665,8 @@
           <a:cs typeface="+mn-cs"/>
         </a:defRPr>
       </a:lvl8pPr>
-      <a:lvl9pPr algn="l" defTabSz="342900" eaLnBrk="1" hangingPunct="1" latinLnBrk="0" marL="2743200" rtl="0">
-        <a:defRPr kern="1200" sz="1350">
+      <a:lvl9pPr algn="l" defTabSz="914400" eaLnBrk="1" hangingPunct="1" latinLnBrk="0" marL="3657600" rtl="0">
+        <a:defRPr kern="1200" sz="1800">
           <a:solidFill>
             <a:schemeClr val="tx1"/>
           </a:solidFill>
@@ -3778,8 +3709,8 @@
         </p:nvSpPr>
         <p:spPr>
           <a:xfrm>
-            <a:off x="685800" y="1597819"/>
-            <a:ext cx="7772400" cy="1102519"/>
+            <a:off x="1524000" y="1122363"/>
+            <a:ext cx="9144000" cy="2387600"/>
           </a:xfrm>
         </p:spPr>
         <p:txBody>
@@ -3808,8 +3739,8 @@
         </p:nvSpPr>
         <p:spPr>
           <a:xfrm>
-            <a:off x="1371600" y="2914650"/>
-            <a:ext cx="6400800" cy="1314450"/>
+            <a:off x="1524000" y="3602038"/>
+            <a:ext cx="9144000" cy="1655762"/>
           </a:xfrm>
         </p:spPr>
         <p:txBody>
@@ -3916,6 +3847,51 @@
           </a:p>
         </p:txBody>
       </p:sp>
+      <p:sp>
+        <p:nvSpPr>
+          <p:cNvPr id="5" name="Footer Placeholder 4"/>
+          <p:cNvSpPr>
+            <a:spLocks noGrp="1"/>
+          </p:cNvSpPr>
+          <p:nvPr>
+            <p:ph idx="11" sz="quarter" type="ftr"/>
+          </p:nvPr>
+        </p:nvSpPr>
+        <p:spPr/>
+        <p:txBody>
+          <a:bodyPr/>
+          <a:lstStyle/>
+          <a:p>
+            <a:r>
+              <a:rPr lang="en-GB"/>
+              <a:t>Tâm Anh Oxford Partnership</a:t>
+            </a:r>
+          </a:p>
+        </p:txBody>
+      </p:sp>
+      <p:sp>
+        <p:nvSpPr>
+          <p:cNvPr id="6" name="Slide Number Placeholder 5"/>
+          <p:cNvSpPr>
+            <a:spLocks noGrp="1"/>
+          </p:cNvSpPr>
+          <p:nvPr>
+            <p:ph idx="12" sz="quarter" type="sldNum"/>
+          </p:nvPr>
+        </p:nvSpPr>
+        <p:spPr/>
+        <p:txBody>
+          <a:bodyPr/>
+          <a:lstStyle/>
+          <a:p>
+            <a:fld id="{330EA680-D336-4FF7-8B7A-9848BB0A1C32}" type="slidenum">
+              <a:rPr lang="en-GB" smtClean="0"/>
+              <a:t>‹#›</a:t>
+            </a:fld>
+            <a:endParaRPr lang="en-GB"/>
+          </a:p>
+        </p:txBody>
+      </p:sp>
     </p:spTree>
   </p:cSld>
 </p:sld>
@@ -4007,6 +3983,51 @@
           </a:p>
         </p:txBody>
       </p:sp>
+      <p:sp>
+        <p:nvSpPr>
+          <p:cNvPr id="5" name="Footer Placeholder 4"/>
+          <p:cNvSpPr>
+            <a:spLocks noGrp="1"/>
+          </p:cNvSpPr>
+          <p:nvPr>
+            <p:ph idx="11" sz="quarter" type="ftr"/>
+          </p:nvPr>
+        </p:nvSpPr>
+        <p:spPr/>
+        <p:txBody>
+          <a:bodyPr/>
+          <a:lstStyle/>
+          <a:p>
+            <a:r>
+              <a:rPr lang="en-GB"/>
+              <a:t>Tâm Anh Oxford Partnership</a:t>
+            </a:r>
+          </a:p>
+        </p:txBody>
+      </p:sp>
+      <p:sp>
+        <p:nvSpPr>
+          <p:cNvPr id="6" name="Slide Number Placeholder 5"/>
+          <p:cNvSpPr>
+            <a:spLocks noGrp="1"/>
+          </p:cNvSpPr>
+          <p:nvPr>
+            <p:ph idx="12" sz="quarter" type="sldNum"/>
+          </p:nvPr>
+        </p:nvSpPr>
+        <p:spPr/>
+        <p:txBody>
+          <a:bodyPr/>
+          <a:lstStyle/>
+          <a:p>
+            <a:fld id="{330EA680-D336-4FF7-8B7A-9848BB0A1C32}" type="slidenum">
+              <a:rPr lang="en-GB" smtClean="0"/>
+              <a:t>‹#›</a:t>
+            </a:fld>
+            <a:endParaRPr lang="en-GB"/>
+          </a:p>
+        </p:txBody>
+      </p:sp>
     </p:spTree>
   </p:cSld>
 </p:sld>
@@ -4098,6 +4119,51 @@
           </a:p>
         </p:txBody>
       </p:sp>
+      <p:sp>
+        <p:nvSpPr>
+          <p:cNvPr id="5" name="Footer Placeholder 4"/>
+          <p:cNvSpPr>
+            <a:spLocks noGrp="1"/>
+          </p:cNvSpPr>
+          <p:nvPr>
+            <p:ph idx="11" sz="quarter" type="ftr"/>
+          </p:nvPr>
+        </p:nvSpPr>
+        <p:spPr/>
+        <p:txBody>
+          <a:bodyPr/>
+          <a:lstStyle/>
+          <a:p>
+            <a:r>
+              <a:rPr lang="en-GB"/>
+              <a:t>Tâm Anh Oxford Partnership</a:t>
+            </a:r>
+          </a:p>
+        </p:txBody>
+      </p:sp>
+      <p:sp>
+        <p:nvSpPr>
+          <p:cNvPr id="6" name="Slide Number Placeholder 5"/>
+          <p:cNvSpPr>
+            <a:spLocks noGrp="1"/>
+          </p:cNvSpPr>
+          <p:nvPr>
+            <p:ph idx="12" sz="quarter" type="sldNum"/>
+          </p:nvPr>
+        </p:nvSpPr>
+        <p:spPr/>
+        <p:txBody>
+          <a:bodyPr/>
+          <a:lstStyle/>
+          <a:p>
+            <a:fld id="{330EA680-D336-4FF7-8B7A-9848BB0A1C32}" type="slidenum">
+              <a:rPr lang="en-GB" smtClean="0"/>
+              <a:t>‹#›</a:t>
+            </a:fld>
+            <a:endParaRPr lang="en-GB"/>
+          </a:p>
+        </p:txBody>
+      </p:sp>
     </p:spTree>
   </p:cSld>
 </p:sld>
@@ -4227,6 +4293,51 @@
           </a:p>
         </p:txBody>
       </p:sp>
+      <p:sp>
+        <p:nvSpPr>
+          <p:cNvPr id="5" name="Footer Placeholder 4"/>
+          <p:cNvSpPr>
+            <a:spLocks noGrp="1"/>
+          </p:cNvSpPr>
+          <p:nvPr>
+            <p:ph idx="11" sz="quarter" type="ftr"/>
+          </p:nvPr>
+        </p:nvSpPr>
+        <p:spPr/>
+        <p:txBody>
+          <a:bodyPr/>
+          <a:lstStyle/>
+          <a:p>
+            <a:r>
+              <a:rPr lang="en-GB"/>
+              <a:t>Tâm Anh Oxford Partnership</a:t>
+            </a:r>
+          </a:p>
+        </p:txBody>
+      </p:sp>
+      <p:sp>
+        <p:nvSpPr>
+          <p:cNvPr id="6" name="Slide Number Placeholder 5"/>
+          <p:cNvSpPr>
+            <a:spLocks noGrp="1"/>
+          </p:cNvSpPr>
+          <p:nvPr>
+            <p:ph idx="12" sz="quarter" type="sldNum"/>
+          </p:nvPr>
+        </p:nvSpPr>
+        <p:spPr/>
+        <p:txBody>
+          <a:bodyPr/>
+          <a:lstStyle/>
+          <a:p>
+            <a:fld id="{330EA680-D336-4FF7-8B7A-9848BB0A1C32}" type="slidenum">
+              <a:rPr lang="en-GB" smtClean="0"/>
+              <a:t>‹#›</a:t>
+            </a:fld>
+            <a:endParaRPr lang="en-GB"/>
+          </a:p>
+        </p:txBody>
+      </p:sp>
     </p:spTree>
   </p:cSld>
 </p:sld>
@@ -4290,8 +4401,8 @@
         </p:blipFill>
         <p:spPr bwMode="auto">
           <a:xfrm>
-            <a:off x="825500" y="1193800"/>
-            <a:ext cx="7493000" cy="3390900"/>
+            <a:off x="1295400" y="1816100"/>
+            <a:ext cx="9601200" cy="4343400"/>
           </a:xfrm>
           <a:prstGeom prst="rect">
             <a:avLst/>
@@ -4304,6 +4415,51 @@
           </a:ln>
         </p:spPr>
       </p:pic>
+      <p:sp>
+        <p:nvSpPr>
+          <p:cNvPr id="5" name="Footer Placeholder 4"/>
+          <p:cNvSpPr>
+            <a:spLocks noGrp="1"/>
+          </p:cNvSpPr>
+          <p:nvPr>
+            <p:ph idx="11" sz="quarter" type="ftr"/>
+          </p:nvPr>
+        </p:nvSpPr>
+        <p:spPr/>
+        <p:txBody>
+          <a:bodyPr/>
+          <a:lstStyle/>
+          <a:p>
+            <a:r>
+              <a:rPr lang="en-GB"/>
+              <a:t>Tâm Anh Oxford Partnership</a:t>
+            </a:r>
+          </a:p>
+        </p:txBody>
+      </p:sp>
+      <p:sp>
+        <p:nvSpPr>
+          <p:cNvPr id="6" name="Slide Number Placeholder 5"/>
+          <p:cNvSpPr>
+            <a:spLocks noGrp="1"/>
+          </p:cNvSpPr>
+          <p:nvPr>
+            <p:ph idx="12" sz="quarter" type="sldNum"/>
+          </p:nvPr>
+        </p:nvSpPr>
+        <p:spPr/>
+        <p:txBody>
+          <a:bodyPr/>
+          <a:lstStyle/>
+          <a:p>
+            <a:fld id="{330EA680-D336-4FF7-8B7A-9848BB0A1C32}" type="slidenum">
+              <a:rPr lang="en-GB" smtClean="0"/>
+              <a:t>‹#›</a:t>
+            </a:fld>
+            <a:endParaRPr lang="en-GB"/>
+          </a:p>
+        </p:txBody>
+      </p:sp>
     </p:spTree>
   </p:cSld>
 </p:sld>
@@ -4388,6 +4544,51 @@
           </a:p>
         </p:txBody>
       </p:sp>
+      <p:sp>
+        <p:nvSpPr>
+          <p:cNvPr id="5" name="Footer Placeholder 4"/>
+          <p:cNvSpPr>
+            <a:spLocks noGrp="1"/>
+          </p:cNvSpPr>
+          <p:nvPr>
+            <p:ph idx="11" sz="quarter" type="ftr"/>
+          </p:nvPr>
+        </p:nvSpPr>
+        <p:spPr/>
+        <p:txBody>
+          <a:bodyPr/>
+          <a:lstStyle/>
+          <a:p>
+            <a:r>
+              <a:rPr lang="en-GB"/>
+              <a:t>Tâm Anh Oxford Partnership</a:t>
+            </a:r>
+          </a:p>
+        </p:txBody>
+      </p:sp>
+      <p:sp>
+        <p:nvSpPr>
+          <p:cNvPr id="6" name="Slide Number Placeholder 5"/>
+          <p:cNvSpPr>
+            <a:spLocks noGrp="1"/>
+          </p:cNvSpPr>
+          <p:nvPr>
+            <p:ph idx="12" sz="quarter" type="sldNum"/>
+          </p:nvPr>
+        </p:nvSpPr>
+        <p:spPr/>
+        <p:txBody>
+          <a:bodyPr/>
+          <a:lstStyle/>
+          <a:p>
+            <a:fld id="{330EA680-D336-4FF7-8B7A-9848BB0A1C32}" type="slidenum">
+              <a:rPr lang="en-GB" smtClean="0"/>
+              <a:t>‹#›</a:t>
+            </a:fld>
+            <a:endParaRPr lang="en-GB"/>
+          </a:p>
+        </p:txBody>
+      </p:sp>
     </p:spTree>
   </p:cSld>
 </p:sld>
@@ -4472,6 +4673,51 @@
           </a:p>
         </p:txBody>
       </p:sp>
+      <p:sp>
+        <p:nvSpPr>
+          <p:cNvPr id="5" name="Footer Placeholder 4"/>
+          <p:cNvSpPr>
+            <a:spLocks noGrp="1"/>
+          </p:cNvSpPr>
+          <p:nvPr>
+            <p:ph idx="11" sz="quarter" type="ftr"/>
+          </p:nvPr>
+        </p:nvSpPr>
+        <p:spPr/>
+        <p:txBody>
+          <a:bodyPr/>
+          <a:lstStyle/>
+          <a:p>
+            <a:r>
+              <a:rPr lang="en-GB"/>
+              <a:t>Tâm Anh Oxford Partnership</a:t>
+            </a:r>
+          </a:p>
+        </p:txBody>
+      </p:sp>
+      <p:sp>
+        <p:nvSpPr>
+          <p:cNvPr id="6" name="Slide Number Placeholder 5"/>
+          <p:cNvSpPr>
+            <a:spLocks noGrp="1"/>
+          </p:cNvSpPr>
+          <p:nvPr>
+            <p:ph idx="12" sz="quarter" type="sldNum"/>
+          </p:nvPr>
+        </p:nvSpPr>
+        <p:spPr/>
+        <p:txBody>
+          <a:bodyPr/>
+          <a:lstStyle/>
+          <a:p>
+            <a:fld id="{330EA680-D336-4FF7-8B7A-9848BB0A1C32}" type="slidenum">
+              <a:rPr lang="en-GB" smtClean="0"/>
+              <a:t>‹#›</a:t>
+            </a:fld>
+            <a:endParaRPr lang="en-GB"/>
+          </a:p>
+        </p:txBody>
+      </p:sp>
     </p:spTree>
   </p:cSld>
 </p:sld>
@@ -4570,6 +4816,51 @@
           </a:p>
         </p:txBody>
       </p:sp>
+      <p:sp>
+        <p:nvSpPr>
+          <p:cNvPr id="5" name="Footer Placeholder 4"/>
+          <p:cNvSpPr>
+            <a:spLocks noGrp="1"/>
+          </p:cNvSpPr>
+          <p:nvPr>
+            <p:ph idx="11" sz="quarter" type="ftr"/>
+          </p:nvPr>
+        </p:nvSpPr>
+        <p:spPr/>
+        <p:txBody>
+          <a:bodyPr/>
+          <a:lstStyle/>
+          <a:p>
+            <a:r>
+              <a:rPr lang="en-GB"/>
+              <a:t>Tâm Anh Oxford Partnership</a:t>
+            </a:r>
+          </a:p>
+        </p:txBody>
+      </p:sp>
+      <p:sp>
+        <p:nvSpPr>
+          <p:cNvPr id="6" name="Slide Number Placeholder 5"/>
+          <p:cNvSpPr>
+            <a:spLocks noGrp="1"/>
+          </p:cNvSpPr>
+          <p:nvPr>
+            <p:ph idx="12" sz="quarter" type="sldNum"/>
+          </p:nvPr>
+        </p:nvSpPr>
+        <p:spPr/>
+        <p:txBody>
+          <a:bodyPr/>
+          <a:lstStyle/>
+          <a:p>
+            <a:fld id="{330EA680-D336-4FF7-8B7A-9848BB0A1C32}" type="slidenum">
+              <a:rPr lang="en-GB" smtClean="0"/>
+              <a:t>‹#›</a:t>
+            </a:fld>
+            <a:endParaRPr lang="en-GB"/>
+          </a:p>
+        </p:txBody>
+      </p:sp>
     </p:spTree>
   </p:cSld>
 </p:sld>
@@ -4633,8 +4924,8 @@
         </p:blipFill>
         <p:spPr bwMode="auto">
           <a:xfrm>
-            <a:off x="812800" y="1193800"/>
-            <a:ext cx="7518400" cy="3390900"/>
+            <a:off x="1282700" y="1816100"/>
+            <a:ext cx="9626600" cy="4343400"/>
           </a:xfrm>
           <a:prstGeom prst="rect">
             <a:avLst/>
@@ -4647,6 +4938,51 @@
           </a:ln>
         </p:spPr>
       </p:pic>
+      <p:sp>
+        <p:nvSpPr>
+          <p:cNvPr id="5" name="Footer Placeholder 4"/>
+          <p:cNvSpPr>
+            <a:spLocks noGrp="1"/>
+          </p:cNvSpPr>
+          <p:nvPr>
+            <p:ph idx="11" sz="quarter" type="ftr"/>
+          </p:nvPr>
+        </p:nvSpPr>
+        <p:spPr/>
+        <p:txBody>
+          <a:bodyPr/>
+          <a:lstStyle/>
+          <a:p>
+            <a:r>
+              <a:rPr lang="en-GB"/>
+              <a:t>Tâm Anh Oxford Partnership</a:t>
+            </a:r>
+          </a:p>
+        </p:txBody>
+      </p:sp>
+      <p:sp>
+        <p:nvSpPr>
+          <p:cNvPr id="6" name="Slide Number Placeholder 5"/>
+          <p:cNvSpPr>
+            <a:spLocks noGrp="1"/>
+          </p:cNvSpPr>
+          <p:nvPr>
+            <p:ph idx="12" sz="quarter" type="sldNum"/>
+          </p:nvPr>
+        </p:nvSpPr>
+        <p:spPr/>
+        <p:txBody>
+          <a:bodyPr/>
+          <a:lstStyle/>
+          <a:p>
+            <a:fld id="{330EA680-D336-4FF7-8B7A-9848BB0A1C32}" type="slidenum">
+              <a:rPr lang="en-GB" smtClean="0"/>
+              <a:t>‹#›</a:t>
+            </a:fld>
+            <a:endParaRPr lang="en-GB"/>
+          </a:p>
+        </p:txBody>
+      </p:sp>
     </p:spTree>
   </p:cSld>
 </p:sld>
@@ -4724,6 +5060,51 @@
           </a:p>
         </p:txBody>
       </p:sp>
+      <p:sp>
+        <p:nvSpPr>
+          <p:cNvPr id="5" name="Footer Placeholder 4"/>
+          <p:cNvSpPr>
+            <a:spLocks noGrp="1"/>
+          </p:cNvSpPr>
+          <p:nvPr>
+            <p:ph idx="11" sz="quarter" type="ftr"/>
+          </p:nvPr>
+        </p:nvSpPr>
+        <p:spPr/>
+        <p:txBody>
+          <a:bodyPr/>
+          <a:lstStyle/>
+          <a:p>
+            <a:r>
+              <a:rPr lang="en-GB"/>
+              <a:t>Tâm Anh Oxford Partnership</a:t>
+            </a:r>
+          </a:p>
+        </p:txBody>
+      </p:sp>
+      <p:sp>
+        <p:nvSpPr>
+          <p:cNvPr id="6" name="Slide Number Placeholder 5"/>
+          <p:cNvSpPr>
+            <a:spLocks noGrp="1"/>
+          </p:cNvSpPr>
+          <p:nvPr>
+            <p:ph idx="12" sz="quarter" type="sldNum"/>
+          </p:nvPr>
+        </p:nvSpPr>
+        <p:spPr/>
+        <p:txBody>
+          <a:bodyPr/>
+          <a:lstStyle/>
+          <a:p>
+            <a:fld id="{330EA680-D336-4FF7-8B7A-9848BB0A1C32}" type="slidenum">
+              <a:rPr lang="en-GB" smtClean="0"/>
+              <a:t>‹#›</a:t>
+            </a:fld>
+            <a:endParaRPr lang="en-GB"/>
+          </a:p>
+        </p:txBody>
+      </p:sp>
     </p:spTree>
   </p:cSld>
 </p:sld>
@@ -4829,6 +5210,51 @@
           </a:p>
         </p:txBody>
       </p:sp>
+      <p:sp>
+        <p:nvSpPr>
+          <p:cNvPr id="5" name="Footer Placeholder 4"/>
+          <p:cNvSpPr>
+            <a:spLocks noGrp="1"/>
+          </p:cNvSpPr>
+          <p:nvPr>
+            <p:ph idx="11" sz="quarter" type="ftr"/>
+          </p:nvPr>
+        </p:nvSpPr>
+        <p:spPr/>
+        <p:txBody>
+          <a:bodyPr/>
+          <a:lstStyle/>
+          <a:p>
+            <a:r>
+              <a:rPr lang="en-GB"/>
+              <a:t>Tâm Anh Oxford Partnership</a:t>
+            </a:r>
+          </a:p>
+        </p:txBody>
+      </p:sp>
+      <p:sp>
+        <p:nvSpPr>
+          <p:cNvPr id="6" name="Slide Number Placeholder 5"/>
+          <p:cNvSpPr>
+            <a:spLocks noGrp="1"/>
+          </p:cNvSpPr>
+          <p:nvPr>
+            <p:ph idx="12" sz="quarter" type="sldNum"/>
+          </p:nvPr>
+        </p:nvSpPr>
+        <p:spPr/>
+        <p:txBody>
+          <a:bodyPr/>
+          <a:lstStyle/>
+          <a:p>
+            <a:fld id="{330EA680-D336-4FF7-8B7A-9848BB0A1C32}" type="slidenum">
+              <a:rPr lang="en-GB" smtClean="0"/>
+              <a:t>‹#›</a:t>
+            </a:fld>
+            <a:endParaRPr lang="en-GB"/>
+          </a:p>
+        </p:txBody>
+      </p:sp>
     </p:spTree>
   </p:cSld>
 </p:sld>
@@ -4927,13 +5353,58 @@
           </a:p>
         </p:txBody>
       </p:sp>
+      <p:sp>
+        <p:nvSpPr>
+          <p:cNvPr id="5" name="Footer Placeholder 4"/>
+          <p:cNvSpPr>
+            <a:spLocks noGrp="1"/>
+          </p:cNvSpPr>
+          <p:nvPr>
+            <p:ph idx="11" sz="quarter" type="ftr"/>
+          </p:nvPr>
+        </p:nvSpPr>
+        <p:spPr/>
+        <p:txBody>
+          <a:bodyPr/>
+          <a:lstStyle/>
+          <a:p>
+            <a:r>
+              <a:rPr lang="en-GB"/>
+              <a:t>Tâm Anh Oxford Partnership</a:t>
+            </a:r>
+          </a:p>
+        </p:txBody>
+      </p:sp>
+      <p:sp>
+        <p:nvSpPr>
+          <p:cNvPr id="6" name="Slide Number Placeholder 5"/>
+          <p:cNvSpPr>
+            <a:spLocks noGrp="1"/>
+          </p:cNvSpPr>
+          <p:nvPr>
+            <p:ph idx="12" sz="quarter" type="sldNum"/>
+          </p:nvPr>
+        </p:nvSpPr>
+        <p:spPr/>
+        <p:txBody>
+          <a:bodyPr/>
+          <a:lstStyle/>
+          <a:p>
+            <a:fld id="{330EA680-D336-4FF7-8B7A-9848BB0A1C32}" type="slidenum">
+              <a:rPr lang="en-GB" smtClean="0"/>
+              <a:t>‹#›</a:t>
+            </a:fld>
+            <a:endParaRPr lang="en-GB"/>
+          </a:p>
+        </p:txBody>
+      </p:sp>
     </p:spTree>
   </p:cSld>
 </p:sld>
 </file>
 
 <file path=ppt/theme/theme1.xml><?xml version="1.0" encoding="utf-8"?>
-<a:theme xmlns:a="http://schemas.openxmlformats.org/drawingml/2006/main" name="Office Theme">
+<a:theme xmlns:a="http://schemas.openxmlformats.org/drawingml/2006/main" name="office theme">
   <a:themeElements>
     <a:clrScheme name="Office">
       <a:dk1>
@@ -4943,39 +5414,39 @@
         <a:sysClr val="window" lastClr="FFFFFF"/>
       </a:lt1>
       <a:dk2>
-        <a:srgbClr val="1F497D"/>
+        <a:srgbClr val="0E2841"/>
       </a:dk2>
       <a:lt2>
-        <a:srgbClr val="EEECE1"/>
+        <a:srgbClr val="E8E8E8"/>
       </a:lt2>
       <a:accent1>
-        <a:srgbClr val="4F81BD"/>
+        <a:srgbClr val="156082"/>
       </a:accent1>
       <a:accent2>
-        <a:srgbClr val="C0504D"/>
+        <a:srgbClr val="E97132"/>
       </a:accent2>
       <a:accent3>
-        <a:srgbClr val="9BBB59"/>
+        <a:srgbClr val="196B24"/>
       </a:accent3>
       <a:accent4>
-        <a:srgbClr val="8064A2"/>
+        <a:srgbClr val="0F9ED5"/>
       </a:accent4>
       <a:accent5>
-        <a:srgbClr val="4BACC6"/>
+        <a:srgbClr val="A02B93"/>
       </a:accent5>
       <a:accent6>
-        <a:srgbClr val="F79646"/>
+        <a:srgbClr val="4EA72E"/>
       </a:accent6>
       <a:hlink>
-        <a:srgbClr val="0000FF"/>
+        <a:srgbClr val="467886"/>
       </a:hlink>
       <a:folHlink>
-        <a:srgbClr val="800080"/>
+        <a:srgbClr val="96607D"/>
       </a:folHlink>
     </a:clrScheme>
-    <a:fontScheme name="Office">
+    <a:fontScheme name="Office Theme">
       <a:majorFont>
-        <a:latin typeface="Calibri"/>
+        <a:latin typeface="Aptos Display" panose="020F0302020204030204"/>
         <a:ea typeface=""/>
         <a:cs typeface=""/>
         <a:font script="Jpan" typeface="ＭＳ Ｐゴシック"/>
@@ -5010,7 +5481,7 @@
         <a:font script="Geor" typeface="Sylfaen"/>
       </a:majorFont>
       <a:minorFont>
-        <a:latin typeface="Calibri"/>
+        <a:latin typeface="Aptos" panose="020B0004020202020204"/>
         <a:ea typeface=""/>
         <a:cs typeface=""/>
         <a:font script="Jpan" typeface="ＭＳ Ｐゴシック"/>
@@ -5045,7 +5516,7 @@
         <a:font script="Geor" typeface="Sylfaen"/>
       </a:minorFont>
     </a:fontScheme>
-    <a:fmtScheme name="Office">
+    <a:fmtScheme name="Office Theme">
       <a:fillStyleLst>
         <a:solidFill>
           <a:schemeClr val="phClr"/>
@@ -5054,180 +5525,136 @@
           <a:gsLst>
             <a:gs pos="0">
               <a:schemeClr val="phClr">
-                <a:tint val="50000"/>
-                <a:satMod val="300000"/>
+                <a:lumMod val="110000"/>
+                <a:satMod val="105000"/>
+                <a:tint val="67000"/>
               </a:schemeClr>
             </a:gs>
-            <a:gs pos="35000">
+            <a:gs pos="50000">
               <a:schemeClr val="phClr">
-                <a:tint val="37000"/>
-                <a:satMod val="300000"/>
+                <a:lumMod val="105000"/>
+                <a:satMod val="103000"/>
+                <a:tint val="73000"/>
               </a:schemeClr>
             </a:gs>
             <a:gs pos="100000">
               <a:schemeClr val="phClr">
-                <a:tint val="15000"/>
-                <a:satMod val="350000"/>
+                <a:lumMod val="105000"/>
+                <a:satMod val="109000"/>
+                <a:tint val="81000"/>
               </a:schemeClr>
             </a:gs>
           </a:gsLst>
-          <a:lin ang="16200000" scaled="1"/>
+          <a:lin ang="5400000" scaled="0"/>
         </a:gradFill>
         <a:gradFill rotWithShape="1">
           <a:gsLst>
             <a:gs pos="0">
               <a:schemeClr val="phClr">
-                <a:tint val="100000"/>
+                <a:satMod val="103000"/>
+                <a:lumMod val="102000"/>
+                <a:tint val="94000"/>
+              </a:schemeClr>
+            </a:gs>
+            <a:gs pos="50000">
+              <a:schemeClr val="phClr">
+                <a:satMod val="110000"/>
+                <a:lumMod val="100000"/>
                 <a:shade val="100000"/>
-                <a:satMod val="130000"/>
               </a:schemeClr>
             </a:gs>
             <a:gs pos="100000">
               <a:schemeClr val="phClr">
-                <a:tint val="50000"/>
-                <a:shade val="100000"/>
-                <a:satMod val="350000"/>
+                <a:lumMod val="99000"/>
+                <a:satMod val="120000"/>
+                <a:shade val="78000"/>
               </a:schemeClr>
             </a:gs>
           </a:gsLst>
-          <a:lin ang="16200000" scaled="0"/>
+          <a:lin ang="5400000" scaled="0"/>
         </a:gradFill>
       </a:fillStyleLst>
       <a:lnStyleLst>
-        <a:ln w="9525" cap="flat" cmpd="sng" algn="ctr">
+        <a:ln w="12700" cap="flat" cmpd="sng" algn="ctr">
           <a:solidFill>
-            <a:schemeClr val="phClr">
-              <a:shade val="95000"/>
-              <a:satMod val="105000"/>
-            </a:schemeClr>
+            <a:schemeClr val="phClr"/>
           </a:solidFill>
           <a:prstDash val="solid"/>
+          <a:miter lim="800000"/>
+        </a:ln>
+        <a:ln w="19050" cap="flat" cmpd="sng" algn="ctr">
+          <a:solidFill>
+            <a:schemeClr val="phClr"/>
+          </a:solidFill>
+          <a:prstDash val="solid"/>
+          <a:miter lim="800000"/>
         </a:ln>
         <a:ln w="25400" cap="flat" cmpd="sng" algn="ctr">
           <a:solidFill>
             <a:schemeClr val="phClr"/>
           </a:solidFill>
           <a:prstDash val="solid"/>
-        </a:ln>
-        <a:ln w="38100" cap="flat" cmpd="sng" algn="ctr">
-          <a:solidFill>
-            <a:schemeClr val="phClr"/>
-          </a:solidFill>
-          <a:prstDash val="solid"/>
+          <a:miter lim="800000"/>
         </a:ln>
       </a:lnStyleLst>
       <a:effectStyleLst>
         <a:effectStyle>
+          <a:effectLst/>
+        </a:effectStyle>
+        <a:effectStyle>
+          <a:effectLst/>
+        </a:effectStyle>
+        <a:effectStyle>
           <a:effectLst>
-            <a:outerShdw blurRad="40000" dist="20000" dir="5400000" rotWithShape="0">
+            <a:outerShdw blurRad="57150" dist="19050" dir="5400000" algn="ctr" rotWithShape="0">
               <a:srgbClr val="000000">
-                <a:alpha val="38000"/>
+                <a:alpha val="63000"/>
               </a:srgbClr>
             </a:outerShdw>
           </a:effectLst>
-        </a:effectStyle>
-        <a:effectStyle>
-          <a:effectLst>
-            <a:outerShdw blurRad="40000" dist="23000" dir="5400000" rotWithShape="0">
-              <a:srgbClr val="000000">
-                <a:alpha val="35000"/>
-              </a:srgbClr>
-            </a:outerShdw>
-          </a:effectLst>
-        </a:effectStyle>
-        <a:effectStyle>
-          <a:effectLst>
-            <a:outerShdw blurRad="40000" dist="23000" dir="5400000" rotWithShape="0">
-              <a:srgbClr val="000000">
-                <a:alpha val="35000"/>
-              </a:srgbClr>
-            </a:outerShdw>
-          </a:effectLst>
-          <a:scene3d>
-            <a:camera prst="orthographicFront">
-              <a:rot lat="0" lon="0" rev="0"/>
-            </a:camera>
-            <a:lightRig rig="threePt" dir="t">
-              <a:rot lat="0" lon="0" rev="1200000"/>
-            </a:lightRig>
-          </a:scene3d>
-          <a:sp3d>
-            <a:bevelT w="63500" h="25400"/>
-          </a:sp3d>
         </a:effectStyle>
       </a:effectStyleLst>
       <a:bgFillStyleLst>
         <a:solidFill>
           <a:schemeClr val="phClr"/>
         </a:solidFill>
+        <a:solidFill>
+          <a:schemeClr val="phClr">
+            <a:tint val="95000"/>
+            <a:satMod val="170000"/>
+          </a:schemeClr>
+        </a:solidFill>
         <a:gradFill rotWithShape="1">
           <a:gsLst>
             <a:gs pos="0">
               <a:schemeClr val="phClr">
-                <a:tint val="40000"/>
-                <a:satMod val="350000"/>
+                <a:tint val="93000"/>
+                <a:satMod val="150000"/>
+                <a:shade val="98000"/>
+                <a:lumMod val="102000"/>
               </a:schemeClr>
             </a:gs>
-            <a:gs pos="40000">
+            <a:gs pos="50000">
               <a:schemeClr val="phClr">
-                <a:tint val="45000"/>
-                <a:shade val="99000"/>
-                <a:satMod val="350000"/>
+                <a:tint val="98000"/>
+                <a:satMod val="130000"/>
+                <a:shade val="90000"/>
+                <a:lumMod val="103000"/>
               </a:schemeClr>
             </a:gs>
             <a:gs pos="100000">
               <a:schemeClr val="phClr">
-                <a:shade val="20000"/>
-                <a:satMod val="255000"/>
+                <a:shade val="63000"/>
+                <a:satMod val="120000"/>
               </a:schemeClr>
             </a:gs>
           </a:gsLst>
-          <a:path path="circle">
-            <a:fillToRect l="50000" t="-80000" r="50000" b="180000"/>
-          </a:path>
-        </a:gradFill>
-        <a:gradFill rotWithShape="1">
-          <a:gsLst>
-            <a:gs pos="0">
-              <a:schemeClr val="phClr">
-                <a:tint val="80000"/>
-                <a:satMod val="300000"/>
-              </a:schemeClr>
-            </a:gs>
-            <a:gs pos="100000">
-              <a:schemeClr val="phClr">
-                <a:shade val="30000"/>
-                <a:satMod val="200000"/>
-              </a:schemeClr>
-            </a:gs>
-          </a:gsLst>
-          <a:path path="circle">
-            <a:fillToRect l="50000" t="50000" r="50000" b="50000"/>
-          </a:path>
+          <a:lin ang="5400000" scaled="0"/>
         </a:gradFill>
       </a:bgFillStyleLst>
     </a:fmtScheme>
   </a:themeElements>
   <a:objectDefaults>
-    <a:spDef>
-      <a:spPr/>
-      <a:bodyPr/>
-      <a:lstStyle/>
-      <a:style>
-        <a:lnRef idx="1">
-          <a:schemeClr val="accent1"/>
-        </a:lnRef>
-        <a:fillRef idx="3">
-          <a:schemeClr val="accent1"/>
-        </a:fillRef>
-        <a:effectRef idx="2">
-          <a:schemeClr val="accent1"/>
-        </a:effectRef>
-        <a:fontRef idx="minor">
-          <a:schemeClr val="lt1"/>
-        </a:fontRef>
-      </a:style>
-    </a:spDef>
     <a:lnDef>
       <a:spPr/>
       <a:bodyPr/>
@@ -5249,6 +5676,11 @@
     </a:lnDef>
   </a:objectDefaults>
   <a:extraClrSchemeLst/>
+  <a:extLst>
+    <a:ext uri="{05A4C25C-085E-4340-85A3-A5531E510DB2}">
+      <thm15:themeFamily xmlns:thm15="http://schemas.microsoft.com/office/thememl/2012/main" name="Office Theme" id="{2E142A2C-CD16-42D6-873A-C26D2A0506FA}" vid="{1BDDFF52-6CD6-40A5-AB3C-68EB2F1E4D0A}"/>
+    </a:ext>
+  </a:extLst>
 </a:theme>
 </file>
 
